--- a/temp/files/T4-temp.pptx
+++ b/temp/files/T4-temp.pptx
@@ -3315,8 +3315,8 @@
         </p:blipFill>
         <p:spPr>
           <a:xfrm>
-            <a:off x="10180065" y="1645878"/>
-            <a:ext cx="1356326" cy="1127731"/>
+            <a:off x="10103867" y="1645878"/>
+            <a:ext cx="1432524" cy="1127731"/>
           </a:xfrm>
           <a:prstGeom prst="rect">
             <a:avLst/>
@@ -3397,7 +3397,7 @@
       </p:pic>
       <p:pic>
         <p:nvPicPr>
-          <p:cNvPr id="8" name="Picture 7" descr="c2_6_0.jpg"/>
+          <p:cNvPr id="8" name="Picture 7" descr="c9_6_0.jpg"/>
           <p:cNvPicPr>
             <a:picLocks noChangeAspect="1"/>
           </p:cNvPicPr>
@@ -3411,8 +3411,8 @@
         </p:blipFill>
         <p:spPr>
           <a:xfrm>
-            <a:off x="10180065" y="4693802"/>
-            <a:ext cx="1356326" cy="1127731"/>
+            <a:off x="10103867" y="4693802"/>
+            <a:ext cx="1432524" cy="1127731"/>
           </a:xfrm>
           <a:prstGeom prst="rect">
             <a:avLst/>
@@ -6932,8 +6932,8 @@
         </p:blipFill>
         <p:spPr>
           <a:xfrm>
-            <a:off x="426709" y="2255463"/>
-            <a:ext cx="6233004" cy="1203929"/>
+            <a:off x="426709" y="1569680"/>
+            <a:ext cx="6233004" cy="1889712"/>
           </a:xfrm>
           <a:prstGeom prst="rect">
             <a:avLst/>
@@ -7171,7 +7171,7 @@
                             </p:stCondLst>
                             <p:childTnLst>
                               <p:par>
-                                <p:cTn id="11" presetID="2" presetClass="entr" presetSubtype="8" fill="hold" decel="100000" grpId="0" nodeType="clickEffect">
+                                <p:cTn id="11" presetID="10" presetClass="entr" presetSubtype="0" fill="hold" grpId="0" nodeType="clickEffect">
                                   <p:stCondLst>
                                     <p:cond delay="0"/>
                                   </p:stCondLst>
@@ -7194,11 +7194,64 @@
                                         <p:strVal val="visible"/>
                                       </p:to>
                                     </p:set>
+                                    <p:animEffect transition="in" filter="fade">
+                                      <p:cBhvr>
+                                        <p:cTn id="13" dur="450"/>
+                                        <p:tgtEl>
+                                          <p:spTgt spid="4"/>
+                                        </p:tgtEl>
+                                      </p:cBhvr>
+                                    </p:animEffect>
+                                  </p:childTnLst>
+                                </p:cTn>
+                              </p:par>
+                            </p:childTnLst>
+                          </p:cTn>
+                        </p:par>
+                      </p:childTnLst>
+                    </p:cTn>
+                  </p:par>
+                  <p:par>
+                    <p:cTn id="14" fill="hold">
+                      <p:stCondLst>
+                        <p:cond delay="indefinite"/>
+                      </p:stCondLst>
+                      <p:childTnLst>
+                        <p:par>
+                          <p:cTn id="15" fill="hold">
+                            <p:stCondLst>
+                              <p:cond delay="0"/>
+                            </p:stCondLst>
+                            <p:childTnLst>
+                              <p:par>
+                                <p:cTn id="16" presetID="2" presetClass="entr" presetSubtype="8" fill="hold" decel="100000" grpId="0" nodeType="clickEffect">
+                                  <p:stCondLst>
+                                    <p:cond delay="0"/>
+                                  </p:stCondLst>
+                                  <p:childTnLst>
+                                    <p:set>
+                                      <p:cBhvr>
+                                        <p:cTn id="17" dur="1" fill="hold">
+                                          <p:stCondLst>
+                                            <p:cond delay="0"/>
+                                          </p:stCondLst>
+                                        </p:cTn>
+                                        <p:tgtEl>
+                                          <p:spTgt spid="5"/>
+                                        </p:tgtEl>
+                                        <p:attrNameLst>
+                                          <p:attrName>style.visibility</p:attrName>
+                                        </p:attrNameLst>
+                                      </p:cBhvr>
+                                      <p:to>
+                                        <p:strVal val="visible"/>
+                                      </p:to>
+                                    </p:set>
                                     <p:anim calcmode="lin" valueType="num">
                                       <p:cBhvr additive="base">
-                                        <p:cTn id="13" dur="550" fill="hold"/>
-                                        <p:tgtEl>
-                                          <p:spTgt spid="4"/>
+                                        <p:cTn id="18" dur="550" fill="hold"/>
+                                        <p:tgtEl>
+                                          <p:spTgt spid="5"/>
                                         </p:tgtEl>
                                         <p:attrNameLst>
                                           <p:attrName>ppt_x</p:attrName>
@@ -7219,9 +7272,9 @@
                                     </p:anim>
                                     <p:anim calcmode="lin" valueType="num">
                                       <p:cBhvr additive="base">
-                                        <p:cTn id="14" dur="550" fill="hold"/>
-                                        <p:tgtEl>
-                                          <p:spTgt spid="4"/>
+                                        <p:cTn id="19" dur="550" fill="hold"/>
+                                        <p:tgtEl>
+                                          <p:spTgt spid="5"/>
                                         </p:tgtEl>
                                         <p:attrNameLst>
                                           <p:attrName>ppt_y</p:attrName>
@@ -7250,32 +7303,32 @@
                     </p:cTn>
                   </p:par>
                   <p:par>
-                    <p:cTn id="15" fill="hold">
+                    <p:cTn id="20" fill="hold">
                       <p:stCondLst>
                         <p:cond delay="indefinite"/>
                       </p:stCondLst>
                       <p:childTnLst>
                         <p:par>
-                          <p:cTn id="16" fill="hold">
+                          <p:cTn id="21" fill="hold">
                             <p:stCondLst>
                               <p:cond delay="0"/>
                             </p:stCondLst>
                             <p:childTnLst>
                               <p:par>
-                                <p:cTn id="17" presetID="2" presetClass="entr" presetSubtype="8" fill="hold" decel="100000" grpId="0" nodeType="clickEffect">
+                                <p:cTn id="22" presetID="2" presetClass="entr" presetSubtype="8" fill="hold" decel="100000" grpId="0" nodeType="clickEffect">
                                   <p:stCondLst>
                                     <p:cond delay="0"/>
                                   </p:stCondLst>
                                   <p:childTnLst>
                                     <p:set>
                                       <p:cBhvr>
-                                        <p:cTn id="18" dur="1" fill="hold">
+                                        <p:cTn id="23" dur="1" fill="hold">
                                           <p:stCondLst>
                                             <p:cond delay="0"/>
                                           </p:stCondLst>
                                         </p:cTn>
                                         <p:tgtEl>
-                                          <p:spTgt spid="5"/>
+                                          <p:spTgt spid="6"/>
                                         </p:tgtEl>
                                         <p:attrNameLst>
                                           <p:attrName>style.visibility</p:attrName>
@@ -7287,9 +7340,9 @@
                                     </p:set>
                                     <p:anim calcmode="lin" valueType="num">
                                       <p:cBhvr additive="base">
-                                        <p:cTn id="19" dur="550" fill="hold"/>
-                                        <p:tgtEl>
-                                          <p:spTgt spid="5"/>
+                                        <p:cTn id="24" dur="550" fill="hold"/>
+                                        <p:tgtEl>
+                                          <p:spTgt spid="6"/>
                                         </p:tgtEl>
                                         <p:attrNameLst>
                                           <p:attrName>ppt_x</p:attrName>
@@ -7310,9 +7363,9 @@
                                     </p:anim>
                                     <p:anim calcmode="lin" valueType="num">
                                       <p:cBhvr additive="base">
-                                        <p:cTn id="20" dur="550" fill="hold"/>
-                                        <p:tgtEl>
-                                          <p:spTgt spid="5"/>
+                                        <p:cTn id="25" dur="550" fill="hold"/>
+                                        <p:tgtEl>
+                                          <p:spTgt spid="6"/>
                                         </p:tgtEl>
                                         <p:attrNameLst>
                                           <p:attrName>ppt_y</p:attrName>
@@ -7341,32 +7394,32 @@
                     </p:cTn>
                   </p:par>
                   <p:par>
-                    <p:cTn id="21" fill="hold">
+                    <p:cTn id="26" fill="hold">
                       <p:stCondLst>
                         <p:cond delay="indefinite"/>
                       </p:stCondLst>
                       <p:childTnLst>
                         <p:par>
-                          <p:cTn id="22" fill="hold">
+                          <p:cTn id="27" fill="hold">
                             <p:stCondLst>
                               <p:cond delay="0"/>
                             </p:stCondLst>
                             <p:childTnLst>
                               <p:par>
-                                <p:cTn id="23" presetID="2" presetClass="entr" presetSubtype="8" fill="hold" decel="100000" grpId="0" nodeType="clickEffect">
+                                <p:cTn id="28" presetID="2" presetClass="entr" presetSubtype="4" fill="hold" decel="100000" grpId="0" nodeType="clickEffect">
                                   <p:stCondLst>
                                     <p:cond delay="0"/>
                                   </p:stCondLst>
                                   <p:childTnLst>
                                     <p:set>
                                       <p:cBhvr>
-                                        <p:cTn id="24" dur="1" fill="hold">
+                                        <p:cTn id="29" dur="1" fill="hold">
                                           <p:stCondLst>
                                             <p:cond delay="0"/>
                                           </p:stCondLst>
                                         </p:cTn>
                                         <p:tgtEl>
-                                          <p:spTgt spid="6"/>
+                                          <p:spTgt spid="7"/>
                                         </p:tgtEl>
                                         <p:attrNameLst>
                                           <p:attrName>style.visibility</p:attrName>
@@ -7378,9 +7431,9 @@
                                     </p:set>
                                     <p:anim calcmode="lin" valueType="num">
                                       <p:cBhvr additive="base">
-                                        <p:cTn id="25" dur="550" fill="hold"/>
-                                        <p:tgtEl>
-                                          <p:spTgt spid="6"/>
+                                        <p:cTn id="30" dur="550" fill="hold"/>
+                                        <p:tgtEl>
+                                          <p:spTgt spid="7"/>
                                         </p:tgtEl>
                                         <p:attrNameLst>
                                           <p:attrName>ppt_x</p:attrName>
@@ -7389,7 +7442,7 @@
                                       <p:tavLst>
                                         <p:tav tm="0">
                                           <p:val>
-                                            <p:strVal val="0-#ppt_w/2"/>
+                                            <p:strVal val="#ppt_x"/>
                                           </p:val>
                                         </p:tav>
                                         <p:tav tm="100000">
@@ -7401,98 +7454,7 @@
                                     </p:anim>
                                     <p:anim calcmode="lin" valueType="num">
                                       <p:cBhvr additive="base">
-                                        <p:cTn id="26" dur="550" fill="hold"/>
-                                        <p:tgtEl>
-                                          <p:spTgt spid="6"/>
-                                        </p:tgtEl>
-                                        <p:attrNameLst>
-                                          <p:attrName>ppt_y</p:attrName>
-                                        </p:attrNameLst>
-                                      </p:cBhvr>
-                                      <p:tavLst>
-                                        <p:tav tm="0">
-                                          <p:val>
-                                            <p:strVal val="#ppt_y"/>
-                                          </p:val>
-                                        </p:tav>
-                                        <p:tav tm="100000">
-                                          <p:val>
-                                            <p:strVal val="#ppt_y"/>
-                                          </p:val>
-                                        </p:tav>
-                                      </p:tavLst>
-                                    </p:anim>
-                                  </p:childTnLst>
-                                </p:cTn>
-                              </p:par>
-                            </p:childTnLst>
-                          </p:cTn>
-                        </p:par>
-                      </p:childTnLst>
-                    </p:cTn>
-                  </p:par>
-                  <p:par>
-                    <p:cTn id="27" fill="hold">
-                      <p:stCondLst>
-                        <p:cond delay="indefinite"/>
-                      </p:stCondLst>
-                      <p:childTnLst>
-                        <p:par>
-                          <p:cTn id="28" fill="hold">
-                            <p:stCondLst>
-                              <p:cond delay="0"/>
-                            </p:stCondLst>
-                            <p:childTnLst>
-                              <p:par>
-                                <p:cTn id="29" presetID="2" presetClass="entr" presetSubtype="4" fill="hold" decel="100000" grpId="0" nodeType="clickEffect">
-                                  <p:stCondLst>
-                                    <p:cond delay="0"/>
-                                  </p:stCondLst>
-                                  <p:childTnLst>
-                                    <p:set>
-                                      <p:cBhvr>
-                                        <p:cTn id="30" dur="1" fill="hold">
-                                          <p:stCondLst>
-                                            <p:cond delay="0"/>
-                                          </p:stCondLst>
-                                        </p:cTn>
-                                        <p:tgtEl>
-                                          <p:spTgt spid="7"/>
-                                        </p:tgtEl>
-                                        <p:attrNameLst>
-                                          <p:attrName>style.visibility</p:attrName>
-                                        </p:attrNameLst>
-                                      </p:cBhvr>
-                                      <p:to>
-                                        <p:strVal val="visible"/>
-                                      </p:to>
-                                    </p:set>
-                                    <p:anim calcmode="lin" valueType="num">
-                                      <p:cBhvr additive="base">
                                         <p:cTn id="31" dur="550" fill="hold"/>
-                                        <p:tgtEl>
-                                          <p:spTgt spid="7"/>
-                                        </p:tgtEl>
-                                        <p:attrNameLst>
-                                          <p:attrName>ppt_x</p:attrName>
-                                        </p:attrNameLst>
-                                      </p:cBhvr>
-                                      <p:tavLst>
-                                        <p:tav tm="0">
-                                          <p:val>
-                                            <p:strVal val="#ppt_x"/>
-                                          </p:val>
-                                        </p:tav>
-                                        <p:tav tm="100000">
-                                          <p:val>
-                                            <p:strVal val="#ppt_x"/>
-                                          </p:val>
-                                        </p:tav>
-                                      </p:tavLst>
-                                    </p:anim>
-                                    <p:anim calcmode="lin" valueType="num">
-                                      <p:cBhvr additive="base">
-                                        <p:cTn id="32" dur="550" fill="hold"/>
                                         <p:tgtEl>
                                           <p:spTgt spid="7"/>
                                         </p:tgtEl>
@@ -8244,7 +8206,7 @@
         <p:spPr>
           <a:xfrm>
             <a:off x="7589330" y="2103067"/>
-            <a:ext cx="1737316" cy="2118307"/>
+            <a:ext cx="1661118" cy="2118307"/>
           </a:xfrm>
           <a:prstGeom prst="rect">
             <a:avLst/>

--- a/temp/files/T4-temp.pptx
+++ b/temp/files/T4-temp.pptx
@@ -17,6 +17,7 @@
     <p:sldId id="265" r:id="rId16"/>
     <p:sldId id="266" r:id="rId17"/>
     <p:sldId id="267" r:id="rId18"/>
+    <p:sldId id="268" r:id="rId19"/>
   </p:sldIdLst>
   <p:sldSz cx="12191695" cy="6858000" type="screen4x3"/>
   <p:notesSz cx="6858000" cy="9144000"/>
@@ -3140,7 +3141,7 @@
         <p:spPr>
           <a:xfrm>
             <a:off x="9722876" y="3931821"/>
-            <a:ext cx="1889712" cy="2346901"/>
+            <a:ext cx="1889712" cy="2270703"/>
           </a:xfrm>
           <a:prstGeom prst="rect">
             <a:avLst/>
@@ -3291,138 +3292,66 @@
         </p:blipFill>
         <p:spPr>
           <a:xfrm>
-            <a:off x="426709" y="1341086"/>
-            <a:ext cx="11338276" cy="1737316"/>
+            <a:off x="10180065" y="4160415"/>
+            <a:ext cx="1584920" cy="2042108"/>
           </a:xfrm>
           <a:prstGeom prst="rect">
             <a:avLst/>
           </a:prstGeom>
         </p:spPr>
       </p:pic>
-      <p:pic>
-        <p:nvPicPr>
-          <p:cNvPr id="4" name="Picture 3" descr="c9_2_0.jpg"/>
-          <p:cNvPicPr>
-            <a:picLocks noChangeAspect="1"/>
-          </p:cNvPicPr>
+      <p:sp>
+        <p:nvSpPr>
+          <p:cNvPr id="4" name="Rectangle 3">
+            <a:hlinkClick r:id="rId4"/>
+          </p:cNvPr>
+          <p:cNvSpPr/>
           <p:nvPr/>
-        </p:nvPicPr>
-        <p:blipFill>
-          <a:blip r:embed="rId4"/>
-          <a:stretch>
-            <a:fillRect/>
-          </a:stretch>
-        </p:blipFill>
-        <p:spPr>
-          <a:xfrm>
-            <a:off x="10103867" y="1645878"/>
-            <a:ext cx="1432524" cy="1127731"/>
+        </p:nvSpPr>
+        <p:spPr>
+          <a:xfrm>
+            <a:off x="655303" y="4724281"/>
+            <a:ext cx="2218317" cy="754361"/>
           </a:xfrm>
           <a:prstGeom prst="rect">
             <a:avLst/>
           </a:prstGeom>
-        </p:spPr>
-      </p:pic>
-      <p:pic>
-        <p:nvPicPr>
-          <p:cNvPr id="5" name="Picture 4" descr="c9_3_0.jpg"/>
-          <p:cNvPicPr>
-            <a:picLocks noChangeAspect="1"/>
-          </p:cNvPicPr>
-          <p:nvPr/>
-        </p:nvPicPr>
-        <p:blipFill>
-          <a:blip r:embed="rId5"/>
-          <a:stretch>
-            <a:fillRect/>
-          </a:stretch>
-        </p:blipFill>
-        <p:spPr>
-          <a:xfrm>
-            <a:off x="426709" y="2865048"/>
-            <a:ext cx="11338276" cy="1737316"/>
-          </a:xfrm>
-          <a:prstGeom prst="rect">
-            <a:avLst/>
-          </a:prstGeom>
-        </p:spPr>
-      </p:pic>
-      <p:pic>
-        <p:nvPicPr>
-          <p:cNvPr id="6" name="Picture 5" descr="c9_4_0.jpg"/>
-          <p:cNvPicPr>
-            <a:picLocks noChangeAspect="1"/>
-          </p:cNvPicPr>
-          <p:nvPr/>
-        </p:nvPicPr>
-        <p:blipFill>
-          <a:blip r:embed="rId6"/>
-          <a:stretch>
-            <a:fillRect/>
-          </a:stretch>
-        </p:blipFill>
-        <p:spPr>
-          <a:xfrm>
-            <a:off x="10332461" y="3169840"/>
-            <a:ext cx="1203929" cy="1051533"/>
-          </a:xfrm>
-          <a:prstGeom prst="rect">
-            <a:avLst/>
-          </a:prstGeom>
-        </p:spPr>
-      </p:pic>
-      <p:pic>
-        <p:nvPicPr>
-          <p:cNvPr id="7" name="Picture 6" descr="c9_5_0.jpg"/>
-          <p:cNvPicPr>
-            <a:picLocks noChangeAspect="1"/>
-          </p:cNvPicPr>
-          <p:nvPr/>
-        </p:nvPicPr>
-        <p:blipFill>
-          <a:blip r:embed="rId7"/>
-          <a:stretch>
-            <a:fillRect/>
-          </a:stretch>
-        </p:blipFill>
-        <p:spPr>
-          <a:xfrm>
-            <a:off x="426709" y="4389010"/>
-            <a:ext cx="11338276" cy="1737316"/>
-          </a:xfrm>
-          <a:prstGeom prst="rect">
-            <a:avLst/>
-          </a:prstGeom>
-        </p:spPr>
-      </p:pic>
-      <p:pic>
-        <p:nvPicPr>
-          <p:cNvPr id="8" name="Picture 7" descr="c9_6_0.jpg"/>
-          <p:cNvPicPr>
-            <a:picLocks noChangeAspect="1"/>
-          </p:cNvPicPr>
-          <p:nvPr/>
-        </p:nvPicPr>
-        <p:blipFill>
-          <a:blip r:embed="rId8"/>
-          <a:stretch>
-            <a:fillRect/>
-          </a:stretch>
-        </p:blipFill>
-        <p:spPr>
-          <a:xfrm>
-            <a:off x="10103867" y="4693802"/>
-            <a:ext cx="1432524" cy="1127731"/>
-          </a:xfrm>
-          <a:prstGeom prst="rect">
-            <a:avLst/>
-          </a:prstGeom>
-        </p:spPr>
-      </p:pic>
+          <a:solidFill>
+            <a:srgbClr val="FFFFFF">
+              <a:alpha val="0"/>
+            </a:srgbClr>
+          </a:solidFill>
+          <a:ln>
+            <a:noFill/>
+          </a:ln>
+          <a:effectLst/>
+        </p:spPr>
+        <p:style>
+          <a:lnRef idx="1">
+            <a:schemeClr val="accent1"/>
+          </a:lnRef>
+          <a:fillRef idx="3">
+            <a:schemeClr val="accent1"/>
+          </a:fillRef>
+          <a:effectRef idx="2">
+            <a:schemeClr val="accent1"/>
+          </a:effectRef>
+          <a:fontRef idx="minor">
+            <a:schemeClr val="lt1"/>
+          </a:fontRef>
+        </p:style>
+        <p:txBody>
+          <a:bodyPr rtlCol="0" anchor="ctr"/>
+          <a:lstStyle/>
+          <a:p>
+            <a:pPr algn="ctr"/>
+          </a:p>
+        </p:txBody>
+      </p:sp>
       <p:sp>
         <p:nvSpPr>
-          <p:cNvPr id="9" name="TextBox 8">
-            <a:hlinkClick action="ppaction://hlinksldjump" r:id="rId9"/>
+          <p:cNvPr id="5" name="TextBox 4">
+            <a:hlinkClick action="ppaction://hlinksldjump" r:id="rId5"/>
           </p:cNvPr>
           <p:cNvSpPr txBox="1"/>
           <p:nvPr/>
@@ -3487,7 +3416,7 @@
                             </p:stCondLst>
                             <p:childTnLst>
                               <p:par>
-                                <p:cTn id="5" presetID="2" presetClass="entr" presetSubtype="8" fill="hold" decel="100000" grpId="0" nodeType="clickEffect">
+                                <p:cTn id="5" presetID="10" presetClass="entr" presetSubtype="0" fill="hold" grpId="0" nodeType="clickEffect">
                                   <p:stCondLst>
                                     <p:cond delay="0"/>
                                   </p:stCondLst>
@@ -3510,528 +3439,11 @@
                                         <p:strVal val="visible"/>
                                       </p:to>
                                     </p:set>
-                                    <p:anim calcmode="lin" valueType="num">
-                                      <p:cBhvr additive="base">
-                                        <p:cTn id="7" dur="550" fill="hold"/>
-                                        <p:tgtEl>
-                                          <p:spTgt spid="3"/>
-                                        </p:tgtEl>
-                                        <p:attrNameLst>
-                                          <p:attrName>ppt_x</p:attrName>
-                                        </p:attrNameLst>
-                                      </p:cBhvr>
-                                      <p:tavLst>
-                                        <p:tav tm="0">
-                                          <p:val>
-                                            <p:strVal val="0-#ppt_w/2"/>
-                                          </p:val>
-                                        </p:tav>
-                                        <p:tav tm="100000">
-                                          <p:val>
-                                            <p:strVal val="#ppt_x"/>
-                                          </p:val>
-                                        </p:tav>
-                                      </p:tavLst>
-                                    </p:anim>
-                                    <p:anim calcmode="lin" valueType="num">
-                                      <p:cBhvr additive="base">
-                                        <p:cTn id="8" dur="550" fill="hold"/>
-                                        <p:tgtEl>
-                                          <p:spTgt spid="3"/>
-                                        </p:tgtEl>
-                                        <p:attrNameLst>
-                                          <p:attrName>ppt_y</p:attrName>
-                                        </p:attrNameLst>
-                                      </p:cBhvr>
-                                      <p:tavLst>
-                                        <p:tav tm="0">
-                                          <p:val>
-                                            <p:strVal val="#ppt_y"/>
-                                          </p:val>
-                                        </p:tav>
-                                        <p:tav tm="100000">
-                                          <p:val>
-                                            <p:strVal val="#ppt_y"/>
-                                          </p:val>
-                                        </p:tav>
-                                      </p:tavLst>
-                                    </p:anim>
-                                  </p:childTnLst>
-                                </p:cTn>
-                              </p:par>
-                            </p:childTnLst>
-                          </p:cTn>
-                        </p:par>
-                      </p:childTnLst>
-                    </p:cTn>
-                  </p:par>
-                  <p:par>
-                    <p:cTn id="9" fill="hold">
-                      <p:stCondLst>
-                        <p:cond delay="indefinite"/>
-                      </p:stCondLst>
-                      <p:childTnLst>
-                        <p:par>
-                          <p:cTn id="10" fill="hold">
-                            <p:stCondLst>
-                              <p:cond delay="0"/>
-                            </p:stCondLst>
-                            <p:childTnLst>
-                              <p:par>
-                                <p:cTn id="11" presetID="53" presetClass="entr" presetSubtype="16" fill="hold" grpId="0" nodeType="clickEffect">
-                                  <p:stCondLst>
-                                    <p:cond delay="0"/>
-                                  </p:stCondLst>
-                                  <p:childTnLst>
-                                    <p:set>
-                                      <p:cBhvr>
-                                        <p:cTn id="12" dur="1" fill="hold">
-                                          <p:stCondLst>
-                                            <p:cond delay="0"/>
-                                          </p:stCondLst>
-                                        </p:cTn>
-                                        <p:tgtEl>
-                                          <p:spTgt spid="4"/>
-                                        </p:tgtEl>
-                                        <p:attrNameLst>
-                                          <p:attrName>style.visibility</p:attrName>
-                                        </p:attrNameLst>
-                                      </p:cBhvr>
-                                      <p:to>
-                                        <p:strVal val="visible"/>
-                                      </p:to>
-                                    </p:set>
-                                    <p:anim calcmode="lin" valueType="num">
-                                      <p:cBhvr additive="base">
-                                        <p:cTn id="13" dur="420" fill="hold"/>
-                                        <p:tgtEl>
-                                          <p:spTgt spid="4"/>
-                                        </p:tgtEl>
-                                        <p:attrNameLst>
-                                          <p:attrName>ppt_w</p:attrName>
-                                        </p:attrNameLst>
-                                      </p:cBhvr>
-                                      <p:tavLst>
-                                        <p:tav tm="0">
-                                          <p:val>
-                                            <p:strVal val="0"/>
-                                          </p:val>
-                                        </p:tav>
-                                        <p:tav tm="100000">
-                                          <p:val>
-                                            <p:strVal val="#ppt_w"/>
-                                          </p:val>
-                                        </p:tav>
-                                      </p:tavLst>
-                                    </p:anim>
-                                    <p:anim calcmode="lin" valueType="num">
-                                      <p:cBhvr additive="base">
-                                        <p:cTn id="14" dur="420" fill="hold"/>
-                                        <p:tgtEl>
-                                          <p:spTgt spid="4"/>
-                                        </p:tgtEl>
-                                        <p:attrNameLst>
-                                          <p:attrName>ppt_h</p:attrName>
-                                        </p:attrNameLst>
-                                      </p:cBhvr>
-                                      <p:tavLst>
-                                        <p:tav tm="0">
-                                          <p:val>
-                                            <p:strVal val="0"/>
-                                          </p:val>
-                                        </p:tav>
-                                        <p:tav tm="100000">
-                                          <p:val>
-                                            <p:strVal val="#ppt_h"/>
-                                          </p:val>
-                                        </p:tav>
-                                      </p:tavLst>
-                                    </p:anim>
                                     <p:animEffect transition="in" filter="fade">
                                       <p:cBhvr>
-                                        <p:cTn id="15" dur="420"/>
-                                        <p:tgtEl>
-                                          <p:spTgt spid="4"/>
-                                        </p:tgtEl>
-                                      </p:cBhvr>
-                                    </p:animEffect>
-                                  </p:childTnLst>
-                                </p:cTn>
-                              </p:par>
-                            </p:childTnLst>
-                          </p:cTn>
-                        </p:par>
-                      </p:childTnLst>
-                    </p:cTn>
-                  </p:par>
-                  <p:par>
-                    <p:cTn id="16" fill="hold">
-                      <p:stCondLst>
-                        <p:cond delay="indefinite"/>
-                      </p:stCondLst>
-                      <p:childTnLst>
-                        <p:par>
-                          <p:cTn id="17" fill="hold">
-                            <p:stCondLst>
-                              <p:cond delay="0"/>
-                            </p:stCondLst>
-                            <p:childTnLst>
-                              <p:par>
-                                <p:cTn id="18" presetID="2" presetClass="entr" presetSubtype="8" fill="hold" decel="100000" grpId="0" nodeType="clickEffect">
-                                  <p:stCondLst>
-                                    <p:cond delay="0"/>
-                                  </p:stCondLst>
-                                  <p:childTnLst>
-                                    <p:set>
-                                      <p:cBhvr>
-                                        <p:cTn id="19" dur="1" fill="hold">
-                                          <p:stCondLst>
-                                            <p:cond delay="0"/>
-                                          </p:stCondLst>
-                                        </p:cTn>
-                                        <p:tgtEl>
-                                          <p:spTgt spid="5"/>
-                                        </p:tgtEl>
-                                        <p:attrNameLst>
-                                          <p:attrName>style.visibility</p:attrName>
-                                        </p:attrNameLst>
-                                      </p:cBhvr>
-                                      <p:to>
-                                        <p:strVal val="visible"/>
-                                      </p:to>
-                                    </p:set>
-                                    <p:anim calcmode="lin" valueType="num">
-                                      <p:cBhvr additive="base">
-                                        <p:cTn id="20" dur="550" fill="hold"/>
-                                        <p:tgtEl>
-                                          <p:spTgt spid="5"/>
-                                        </p:tgtEl>
-                                        <p:attrNameLst>
-                                          <p:attrName>ppt_x</p:attrName>
-                                        </p:attrNameLst>
-                                      </p:cBhvr>
-                                      <p:tavLst>
-                                        <p:tav tm="0">
-                                          <p:val>
-                                            <p:strVal val="0-#ppt_w/2"/>
-                                          </p:val>
-                                        </p:tav>
-                                        <p:tav tm="100000">
-                                          <p:val>
-                                            <p:strVal val="#ppt_x"/>
-                                          </p:val>
-                                        </p:tav>
-                                      </p:tavLst>
-                                    </p:anim>
-                                    <p:anim calcmode="lin" valueType="num">
-                                      <p:cBhvr additive="base">
-                                        <p:cTn id="21" dur="550" fill="hold"/>
-                                        <p:tgtEl>
-                                          <p:spTgt spid="5"/>
-                                        </p:tgtEl>
-                                        <p:attrNameLst>
-                                          <p:attrName>ppt_y</p:attrName>
-                                        </p:attrNameLst>
-                                      </p:cBhvr>
-                                      <p:tavLst>
-                                        <p:tav tm="0">
-                                          <p:val>
-                                            <p:strVal val="#ppt_y"/>
-                                          </p:val>
-                                        </p:tav>
-                                        <p:tav tm="100000">
-                                          <p:val>
-                                            <p:strVal val="#ppt_y"/>
-                                          </p:val>
-                                        </p:tav>
-                                      </p:tavLst>
-                                    </p:anim>
-                                  </p:childTnLst>
-                                </p:cTn>
-                              </p:par>
-                            </p:childTnLst>
-                          </p:cTn>
-                        </p:par>
-                      </p:childTnLst>
-                    </p:cTn>
-                  </p:par>
-                  <p:par>
-                    <p:cTn id="22" fill="hold">
-                      <p:stCondLst>
-                        <p:cond delay="indefinite"/>
-                      </p:stCondLst>
-                      <p:childTnLst>
-                        <p:par>
-                          <p:cTn id="23" fill="hold">
-                            <p:stCondLst>
-                              <p:cond delay="0"/>
-                            </p:stCondLst>
-                            <p:childTnLst>
-                              <p:par>
-                                <p:cTn id="24" presetID="53" presetClass="entr" presetSubtype="16" fill="hold" grpId="0" nodeType="clickEffect">
-                                  <p:stCondLst>
-                                    <p:cond delay="0"/>
-                                  </p:stCondLst>
-                                  <p:childTnLst>
-                                    <p:set>
-                                      <p:cBhvr>
-                                        <p:cTn id="25" dur="1" fill="hold">
-                                          <p:stCondLst>
-                                            <p:cond delay="0"/>
-                                          </p:stCondLst>
-                                        </p:cTn>
-                                        <p:tgtEl>
-                                          <p:spTgt spid="6"/>
-                                        </p:tgtEl>
-                                        <p:attrNameLst>
-                                          <p:attrName>style.visibility</p:attrName>
-                                        </p:attrNameLst>
-                                      </p:cBhvr>
-                                      <p:to>
-                                        <p:strVal val="visible"/>
-                                      </p:to>
-                                    </p:set>
-                                    <p:anim calcmode="lin" valueType="num">
-                                      <p:cBhvr additive="base">
-                                        <p:cTn id="26" dur="420" fill="hold"/>
-                                        <p:tgtEl>
-                                          <p:spTgt spid="6"/>
-                                        </p:tgtEl>
-                                        <p:attrNameLst>
-                                          <p:attrName>ppt_w</p:attrName>
-                                        </p:attrNameLst>
-                                      </p:cBhvr>
-                                      <p:tavLst>
-                                        <p:tav tm="0">
-                                          <p:val>
-                                            <p:strVal val="0"/>
-                                          </p:val>
-                                        </p:tav>
-                                        <p:tav tm="100000">
-                                          <p:val>
-                                            <p:strVal val="#ppt_w"/>
-                                          </p:val>
-                                        </p:tav>
-                                      </p:tavLst>
-                                    </p:anim>
-                                    <p:anim calcmode="lin" valueType="num">
-                                      <p:cBhvr additive="base">
-                                        <p:cTn id="27" dur="420" fill="hold"/>
-                                        <p:tgtEl>
-                                          <p:spTgt spid="6"/>
-                                        </p:tgtEl>
-                                        <p:attrNameLst>
-                                          <p:attrName>ppt_h</p:attrName>
-                                        </p:attrNameLst>
-                                      </p:cBhvr>
-                                      <p:tavLst>
-                                        <p:tav tm="0">
-                                          <p:val>
-                                            <p:strVal val="0"/>
-                                          </p:val>
-                                        </p:tav>
-                                        <p:tav tm="100000">
-                                          <p:val>
-                                            <p:strVal val="#ppt_h"/>
-                                          </p:val>
-                                        </p:tav>
-                                      </p:tavLst>
-                                    </p:anim>
-                                    <p:animEffect transition="in" filter="fade">
-                                      <p:cBhvr>
-                                        <p:cTn id="28" dur="420"/>
-                                        <p:tgtEl>
-                                          <p:spTgt spid="6"/>
-                                        </p:tgtEl>
-                                      </p:cBhvr>
-                                    </p:animEffect>
-                                  </p:childTnLst>
-                                </p:cTn>
-                              </p:par>
-                            </p:childTnLst>
-                          </p:cTn>
-                        </p:par>
-                      </p:childTnLst>
-                    </p:cTn>
-                  </p:par>
-                  <p:par>
-                    <p:cTn id="29" fill="hold">
-                      <p:stCondLst>
-                        <p:cond delay="indefinite"/>
-                      </p:stCondLst>
-                      <p:childTnLst>
-                        <p:par>
-                          <p:cTn id="30" fill="hold">
-                            <p:stCondLst>
-                              <p:cond delay="0"/>
-                            </p:stCondLst>
-                            <p:childTnLst>
-                              <p:par>
-                                <p:cTn id="31" presetID="2" presetClass="entr" presetSubtype="8" fill="hold" decel="100000" grpId="0" nodeType="clickEffect">
-                                  <p:stCondLst>
-                                    <p:cond delay="0"/>
-                                  </p:stCondLst>
-                                  <p:childTnLst>
-                                    <p:set>
-                                      <p:cBhvr>
-                                        <p:cTn id="32" dur="1" fill="hold">
-                                          <p:stCondLst>
-                                            <p:cond delay="0"/>
-                                          </p:stCondLst>
-                                        </p:cTn>
-                                        <p:tgtEl>
-                                          <p:spTgt spid="7"/>
-                                        </p:tgtEl>
-                                        <p:attrNameLst>
-                                          <p:attrName>style.visibility</p:attrName>
-                                        </p:attrNameLst>
-                                      </p:cBhvr>
-                                      <p:to>
-                                        <p:strVal val="visible"/>
-                                      </p:to>
-                                    </p:set>
-                                    <p:anim calcmode="lin" valueType="num">
-                                      <p:cBhvr additive="base">
-                                        <p:cTn id="33" dur="550" fill="hold"/>
-                                        <p:tgtEl>
-                                          <p:spTgt spid="7"/>
-                                        </p:tgtEl>
-                                        <p:attrNameLst>
-                                          <p:attrName>ppt_x</p:attrName>
-                                        </p:attrNameLst>
-                                      </p:cBhvr>
-                                      <p:tavLst>
-                                        <p:tav tm="0">
-                                          <p:val>
-                                            <p:strVal val="0-#ppt_w/2"/>
-                                          </p:val>
-                                        </p:tav>
-                                        <p:tav tm="100000">
-                                          <p:val>
-                                            <p:strVal val="#ppt_x"/>
-                                          </p:val>
-                                        </p:tav>
-                                      </p:tavLst>
-                                    </p:anim>
-                                    <p:anim calcmode="lin" valueType="num">
-                                      <p:cBhvr additive="base">
-                                        <p:cTn id="34" dur="550" fill="hold"/>
-                                        <p:tgtEl>
-                                          <p:spTgt spid="7"/>
-                                        </p:tgtEl>
-                                        <p:attrNameLst>
-                                          <p:attrName>ppt_y</p:attrName>
-                                        </p:attrNameLst>
-                                      </p:cBhvr>
-                                      <p:tavLst>
-                                        <p:tav tm="0">
-                                          <p:val>
-                                            <p:strVal val="#ppt_y"/>
-                                          </p:val>
-                                        </p:tav>
-                                        <p:tav tm="100000">
-                                          <p:val>
-                                            <p:strVal val="#ppt_y"/>
-                                          </p:val>
-                                        </p:tav>
-                                      </p:tavLst>
-                                    </p:anim>
-                                  </p:childTnLst>
-                                </p:cTn>
-                              </p:par>
-                            </p:childTnLst>
-                          </p:cTn>
-                        </p:par>
-                      </p:childTnLst>
-                    </p:cTn>
-                  </p:par>
-                  <p:par>
-                    <p:cTn id="35" fill="hold">
-                      <p:stCondLst>
-                        <p:cond delay="indefinite"/>
-                      </p:stCondLst>
-                      <p:childTnLst>
-                        <p:par>
-                          <p:cTn id="36" fill="hold">
-                            <p:stCondLst>
-                              <p:cond delay="0"/>
-                            </p:stCondLst>
-                            <p:childTnLst>
-                              <p:par>
-                                <p:cTn id="37" presetID="53" presetClass="entr" presetSubtype="16" fill="hold" grpId="0" nodeType="clickEffect">
-                                  <p:stCondLst>
-                                    <p:cond delay="0"/>
-                                  </p:stCondLst>
-                                  <p:childTnLst>
-                                    <p:set>
-                                      <p:cBhvr>
-                                        <p:cTn id="38" dur="1" fill="hold">
-                                          <p:stCondLst>
-                                            <p:cond delay="0"/>
-                                          </p:stCondLst>
-                                        </p:cTn>
-                                        <p:tgtEl>
-                                          <p:spTgt spid="8"/>
-                                        </p:tgtEl>
-                                        <p:attrNameLst>
-                                          <p:attrName>style.visibility</p:attrName>
-                                        </p:attrNameLst>
-                                      </p:cBhvr>
-                                      <p:to>
-                                        <p:strVal val="visible"/>
-                                      </p:to>
-                                    </p:set>
-                                    <p:anim calcmode="lin" valueType="num">
-                                      <p:cBhvr additive="base">
-                                        <p:cTn id="39" dur="420" fill="hold"/>
-                                        <p:tgtEl>
-                                          <p:spTgt spid="8"/>
-                                        </p:tgtEl>
-                                        <p:attrNameLst>
-                                          <p:attrName>ppt_w</p:attrName>
-                                        </p:attrNameLst>
-                                      </p:cBhvr>
-                                      <p:tavLst>
-                                        <p:tav tm="0">
-                                          <p:val>
-                                            <p:strVal val="0"/>
-                                          </p:val>
-                                        </p:tav>
-                                        <p:tav tm="100000">
-                                          <p:val>
-                                            <p:strVal val="#ppt_w"/>
-                                          </p:val>
-                                        </p:tav>
-                                      </p:tavLst>
-                                    </p:anim>
-                                    <p:anim calcmode="lin" valueType="num">
-                                      <p:cBhvr additive="base">
-                                        <p:cTn id="40" dur="420" fill="hold"/>
-                                        <p:tgtEl>
-                                          <p:spTgt spid="8"/>
-                                        </p:tgtEl>
-                                        <p:attrNameLst>
-                                          <p:attrName>ppt_h</p:attrName>
-                                        </p:attrNameLst>
-                                      </p:cBhvr>
-                                      <p:tavLst>
-                                        <p:tav tm="0">
-                                          <p:val>
-                                            <p:strVal val="0"/>
-                                          </p:val>
-                                        </p:tav>
-                                        <p:tav tm="100000">
-                                          <p:val>
-                                            <p:strVal val="#ppt_h"/>
-                                          </p:val>
-                                        </p:tav>
-                                      </p:tavLst>
-                                    </p:anim>
-                                    <p:animEffect transition="in" filter="fade">
-                                      <p:cBhvr>
-                                        <p:cTn id="41" dur="420"/>
-                                        <p:tgtEl>
-                                          <p:spTgt spid="8"/>
+                                        <p:cTn id="7" dur="450"/>
+                                        <p:tgtEl>
+                                          <p:spTgt spid="3"/>
                                         </p:tgtEl>
                                       </p:cBhvr>
                                     </p:animEffect>
@@ -4119,8 +3531,8 @@
         </p:blipFill>
         <p:spPr>
           <a:xfrm>
-            <a:off x="426709" y="1417284"/>
-            <a:ext cx="11338276" cy="1356326"/>
+            <a:off x="426709" y="2103067"/>
+            <a:ext cx="5699617" cy="2804089"/>
           </a:xfrm>
           <a:prstGeom prst="rect">
             <a:avLst/>
@@ -4143,8 +3555,8 @@
         </p:blipFill>
         <p:spPr>
           <a:xfrm>
-            <a:off x="3627029" y="1645878"/>
-            <a:ext cx="1508722" cy="822939"/>
+            <a:off x="350511" y="1722076"/>
+            <a:ext cx="11566870" cy="4099457"/>
           </a:xfrm>
           <a:prstGeom prst="rect">
             <a:avLst/>
@@ -4167,114 +3579,18 @@
         </p:blipFill>
         <p:spPr>
           <a:xfrm>
-            <a:off x="426709" y="2712652"/>
-            <a:ext cx="11338276" cy="1356326"/>
+            <a:off x="0" y="5836773"/>
+            <a:ext cx="12191695" cy="1021054"/>
           </a:xfrm>
           <a:prstGeom prst="rect">
             <a:avLst/>
           </a:prstGeom>
         </p:spPr>
       </p:pic>
-      <p:pic>
-        <p:nvPicPr>
-          <p:cNvPr id="6" name="Picture 5" descr="c10_4_0.jpg"/>
-          <p:cNvPicPr>
-            <a:picLocks noChangeAspect="1"/>
-          </p:cNvPicPr>
-          <p:nvPr/>
-        </p:nvPicPr>
-        <p:blipFill>
-          <a:blip r:embed="rId6"/>
-          <a:stretch>
-            <a:fillRect/>
-          </a:stretch>
-        </p:blipFill>
-        <p:spPr>
-          <a:xfrm>
-            <a:off x="4008019" y="2941246"/>
-            <a:ext cx="746741" cy="822939"/>
-          </a:xfrm>
-          <a:prstGeom prst="rect">
-            <a:avLst/>
-          </a:prstGeom>
-        </p:spPr>
-      </p:pic>
-      <p:pic>
-        <p:nvPicPr>
-          <p:cNvPr id="7" name="Picture 6" descr="c10_5_0.jpg"/>
-          <p:cNvPicPr>
-            <a:picLocks noChangeAspect="1"/>
-          </p:cNvPicPr>
-          <p:nvPr/>
-        </p:nvPicPr>
-        <p:blipFill>
-          <a:blip r:embed="rId7"/>
-          <a:stretch>
-            <a:fillRect/>
-          </a:stretch>
-        </p:blipFill>
-        <p:spPr>
-          <a:xfrm>
-            <a:off x="426709" y="4008019"/>
-            <a:ext cx="11338276" cy="1356326"/>
-          </a:xfrm>
-          <a:prstGeom prst="rect">
-            <a:avLst/>
-          </a:prstGeom>
-        </p:spPr>
-      </p:pic>
-      <p:pic>
-        <p:nvPicPr>
-          <p:cNvPr id="8" name="Picture 7" descr="c10_6_0.jpg"/>
-          <p:cNvPicPr>
-            <a:picLocks noChangeAspect="1"/>
-          </p:cNvPicPr>
-          <p:nvPr/>
-        </p:nvPicPr>
-        <p:blipFill>
-          <a:blip r:embed="rId8"/>
-          <a:stretch>
-            <a:fillRect/>
-          </a:stretch>
-        </p:blipFill>
-        <p:spPr>
-          <a:xfrm>
-            <a:off x="4008019" y="4312812"/>
-            <a:ext cx="822939" cy="670543"/>
-          </a:xfrm>
-          <a:prstGeom prst="rect">
-            <a:avLst/>
-          </a:prstGeom>
-        </p:spPr>
-      </p:pic>
-      <p:pic>
-        <p:nvPicPr>
-          <p:cNvPr id="9" name="Picture 8" descr="c10_7_0.jpg"/>
-          <p:cNvPicPr>
-            <a:picLocks noChangeAspect="1"/>
-          </p:cNvPicPr>
-          <p:nvPr/>
-        </p:nvPicPr>
-        <p:blipFill>
-          <a:blip r:embed="rId9"/>
-          <a:stretch>
-            <a:fillRect/>
-          </a:stretch>
-        </p:blipFill>
-        <p:spPr>
-          <a:xfrm>
-            <a:off x="7665528" y="45718"/>
-            <a:ext cx="4099457" cy="1661118"/>
-          </a:xfrm>
-          <a:prstGeom prst="rect">
-            <a:avLst/>
-          </a:prstGeom>
-        </p:spPr>
-      </p:pic>
       <p:sp>
         <p:nvSpPr>
-          <p:cNvPr id="10" name="TextBox 9">
-            <a:hlinkClick action="ppaction://hlinksldjump" r:id="rId10"/>
+          <p:cNvPr id="6" name="TextBox 5">
+            <a:hlinkClick action="ppaction://hlinksldjump" r:id="rId6"/>
           </p:cNvPr>
           <p:cNvSpPr txBox="1"/>
           <p:nvPr/>
@@ -4339,7 +3655,7 @@
                             </p:stCondLst>
                             <p:childTnLst>
                               <p:par>
-                                <p:cTn id="5" presetID="2" presetClass="entr" presetSubtype="8" fill="hold" decel="100000" grpId="0" nodeType="clickEffect">
+                                <p:cTn id="5" presetID="2" presetClass="entr" presetSubtype="4" fill="hold" decel="100000" grpId="0" nodeType="clickEffect">
                                   <p:stCondLst>
                                     <p:cond delay="0"/>
                                   </p:stCondLst>
@@ -4375,7 +3691,7 @@
                                       <p:tavLst>
                                         <p:tav tm="0">
                                           <p:val>
-                                            <p:strVal val="0-#ppt_w/2"/>
+                                            <p:strVal val="#ppt_x"/>
                                           </p:val>
                                         </p:tav>
                                         <p:tav tm="100000">
@@ -4398,7 +3714,7 @@
                                       <p:tavLst>
                                         <p:tav tm="0">
                                           <p:val>
-                                            <p:strVal val="#ppt_y"/>
+                                            <p:strVal val="1+#ppt_h/2"/>
                                           </p:val>
                                         </p:tav>
                                         <p:tav tm="100000">
@@ -4455,7 +3771,7 @@
                                     </p:set>
                                     <p:animEffect transition="in" filter="fade">
                                       <p:cBhvr>
-                                        <p:cTn id="13" dur="450"/>
+                                        <p:cTn id="13" dur="500"/>
                                         <p:tgtEl>
                                           <p:spTgt spid="4"/>
                                         </p:tgtEl>
@@ -4483,7 +3799,7 @@
                             </p:stCondLst>
                             <p:childTnLst>
                               <p:par>
-                                <p:cTn id="16" presetID="2" presetClass="entr" presetSubtype="8" fill="hold" decel="100000" grpId="0" nodeType="clickEffect">
+                                <p:cTn id="16" presetID="2" presetClass="entr" presetSubtype="4" fill="hold" decel="100000" grpId="0" nodeType="clickEffect">
                                   <p:stCondLst>
                                     <p:cond delay="0"/>
                                   </p:stCondLst>
@@ -4519,7 +3835,7 @@
                                       <p:tavLst>
                                         <p:tav tm="0">
                                           <p:val>
-                                            <p:strVal val="0-#ppt_w/2"/>
+                                            <p:strVal val="#ppt_x"/>
                                           </p:val>
                                         </p:tav>
                                         <p:tav tm="100000">
@@ -4542,7 +3858,7 @@
                                       <p:tavLst>
                                         <p:tav tm="0">
                                           <p:val>
-                                            <p:strVal val="#ppt_y"/>
+                                            <p:strVal val="1+#ppt_h/2"/>
                                           </p:val>
                                         </p:tav>
                                         <p:tav tm="100000">
@@ -4552,302 +3868,6 @@
                                         </p:tav>
                                       </p:tavLst>
                                     </p:anim>
-                                  </p:childTnLst>
-                                </p:cTn>
-                              </p:par>
-                            </p:childTnLst>
-                          </p:cTn>
-                        </p:par>
-                      </p:childTnLst>
-                    </p:cTn>
-                  </p:par>
-                  <p:par>
-                    <p:cTn id="20" fill="hold">
-                      <p:stCondLst>
-                        <p:cond delay="indefinite"/>
-                      </p:stCondLst>
-                      <p:childTnLst>
-                        <p:par>
-                          <p:cTn id="21" fill="hold">
-                            <p:stCondLst>
-                              <p:cond delay="0"/>
-                            </p:stCondLst>
-                            <p:childTnLst>
-                              <p:par>
-                                <p:cTn id="22" presetID="10" presetClass="entr" presetSubtype="0" fill="hold" grpId="0" nodeType="clickEffect">
-                                  <p:stCondLst>
-                                    <p:cond delay="0"/>
-                                  </p:stCondLst>
-                                  <p:childTnLst>
-                                    <p:set>
-                                      <p:cBhvr>
-                                        <p:cTn id="23" dur="1" fill="hold">
-                                          <p:stCondLst>
-                                            <p:cond delay="0"/>
-                                          </p:stCondLst>
-                                        </p:cTn>
-                                        <p:tgtEl>
-                                          <p:spTgt spid="6"/>
-                                        </p:tgtEl>
-                                        <p:attrNameLst>
-                                          <p:attrName>style.visibility</p:attrName>
-                                        </p:attrNameLst>
-                                      </p:cBhvr>
-                                      <p:to>
-                                        <p:strVal val="visible"/>
-                                      </p:to>
-                                    </p:set>
-                                    <p:animEffect transition="in" filter="fade">
-                                      <p:cBhvr>
-                                        <p:cTn id="24" dur="450"/>
-                                        <p:tgtEl>
-                                          <p:spTgt spid="6"/>
-                                        </p:tgtEl>
-                                      </p:cBhvr>
-                                    </p:animEffect>
-                                  </p:childTnLst>
-                                </p:cTn>
-                              </p:par>
-                            </p:childTnLst>
-                          </p:cTn>
-                        </p:par>
-                      </p:childTnLst>
-                    </p:cTn>
-                  </p:par>
-                  <p:par>
-                    <p:cTn id="25" fill="hold">
-                      <p:stCondLst>
-                        <p:cond delay="indefinite"/>
-                      </p:stCondLst>
-                      <p:childTnLst>
-                        <p:par>
-                          <p:cTn id="26" fill="hold">
-                            <p:stCondLst>
-                              <p:cond delay="0"/>
-                            </p:stCondLst>
-                            <p:childTnLst>
-                              <p:par>
-                                <p:cTn id="27" presetID="2" presetClass="entr" presetSubtype="8" fill="hold" decel="100000" grpId="0" nodeType="clickEffect">
-                                  <p:stCondLst>
-                                    <p:cond delay="0"/>
-                                  </p:stCondLst>
-                                  <p:childTnLst>
-                                    <p:set>
-                                      <p:cBhvr>
-                                        <p:cTn id="28" dur="1" fill="hold">
-                                          <p:stCondLst>
-                                            <p:cond delay="0"/>
-                                          </p:stCondLst>
-                                        </p:cTn>
-                                        <p:tgtEl>
-                                          <p:spTgt spid="7"/>
-                                        </p:tgtEl>
-                                        <p:attrNameLst>
-                                          <p:attrName>style.visibility</p:attrName>
-                                        </p:attrNameLst>
-                                      </p:cBhvr>
-                                      <p:to>
-                                        <p:strVal val="visible"/>
-                                      </p:to>
-                                    </p:set>
-                                    <p:anim calcmode="lin" valueType="num">
-                                      <p:cBhvr additive="base">
-                                        <p:cTn id="29" dur="550" fill="hold"/>
-                                        <p:tgtEl>
-                                          <p:spTgt spid="7"/>
-                                        </p:tgtEl>
-                                        <p:attrNameLst>
-                                          <p:attrName>ppt_x</p:attrName>
-                                        </p:attrNameLst>
-                                      </p:cBhvr>
-                                      <p:tavLst>
-                                        <p:tav tm="0">
-                                          <p:val>
-                                            <p:strVal val="0-#ppt_w/2"/>
-                                          </p:val>
-                                        </p:tav>
-                                        <p:tav tm="100000">
-                                          <p:val>
-                                            <p:strVal val="#ppt_x"/>
-                                          </p:val>
-                                        </p:tav>
-                                      </p:tavLst>
-                                    </p:anim>
-                                    <p:anim calcmode="lin" valueType="num">
-                                      <p:cBhvr additive="base">
-                                        <p:cTn id="30" dur="550" fill="hold"/>
-                                        <p:tgtEl>
-                                          <p:spTgt spid="7"/>
-                                        </p:tgtEl>
-                                        <p:attrNameLst>
-                                          <p:attrName>ppt_y</p:attrName>
-                                        </p:attrNameLst>
-                                      </p:cBhvr>
-                                      <p:tavLst>
-                                        <p:tav tm="0">
-                                          <p:val>
-                                            <p:strVal val="#ppt_y"/>
-                                          </p:val>
-                                        </p:tav>
-                                        <p:tav tm="100000">
-                                          <p:val>
-                                            <p:strVal val="#ppt_y"/>
-                                          </p:val>
-                                        </p:tav>
-                                      </p:tavLst>
-                                    </p:anim>
-                                  </p:childTnLst>
-                                </p:cTn>
-                              </p:par>
-                            </p:childTnLst>
-                          </p:cTn>
-                        </p:par>
-                      </p:childTnLst>
-                    </p:cTn>
-                  </p:par>
-                  <p:par>
-                    <p:cTn id="31" fill="hold">
-                      <p:stCondLst>
-                        <p:cond delay="indefinite"/>
-                      </p:stCondLst>
-                      <p:childTnLst>
-                        <p:par>
-                          <p:cTn id="32" fill="hold">
-                            <p:stCondLst>
-                              <p:cond delay="0"/>
-                            </p:stCondLst>
-                            <p:childTnLst>
-                              <p:par>
-                                <p:cTn id="33" presetID="10" presetClass="entr" presetSubtype="0" fill="hold" grpId="0" nodeType="clickEffect">
-                                  <p:stCondLst>
-                                    <p:cond delay="0"/>
-                                  </p:stCondLst>
-                                  <p:childTnLst>
-                                    <p:set>
-                                      <p:cBhvr>
-                                        <p:cTn id="34" dur="1" fill="hold">
-                                          <p:stCondLst>
-                                            <p:cond delay="0"/>
-                                          </p:stCondLst>
-                                        </p:cTn>
-                                        <p:tgtEl>
-                                          <p:spTgt spid="8"/>
-                                        </p:tgtEl>
-                                        <p:attrNameLst>
-                                          <p:attrName>style.visibility</p:attrName>
-                                        </p:attrNameLst>
-                                      </p:cBhvr>
-                                      <p:to>
-                                        <p:strVal val="visible"/>
-                                      </p:to>
-                                    </p:set>
-                                    <p:animEffect transition="in" filter="fade">
-                                      <p:cBhvr>
-                                        <p:cTn id="35" dur="450"/>
-                                        <p:tgtEl>
-                                          <p:spTgt spid="8"/>
-                                        </p:tgtEl>
-                                      </p:cBhvr>
-                                    </p:animEffect>
-                                  </p:childTnLst>
-                                </p:cTn>
-                              </p:par>
-                            </p:childTnLst>
-                          </p:cTn>
-                        </p:par>
-                      </p:childTnLst>
-                    </p:cTn>
-                  </p:par>
-                  <p:par>
-                    <p:cTn id="36" fill="hold">
-                      <p:stCondLst>
-                        <p:cond delay="indefinite"/>
-                      </p:stCondLst>
-                      <p:childTnLst>
-                        <p:par>
-                          <p:cTn id="37" fill="hold">
-                            <p:stCondLst>
-                              <p:cond delay="0"/>
-                            </p:stCondLst>
-                            <p:childTnLst>
-                              <p:par>
-                                <p:cTn id="38" presetID="53" presetClass="entr" presetSubtype="16" fill="hold" grpId="0" nodeType="clickEffect">
-                                  <p:stCondLst>
-                                    <p:cond delay="0"/>
-                                  </p:stCondLst>
-                                  <p:childTnLst>
-                                    <p:set>
-                                      <p:cBhvr>
-                                        <p:cTn id="39" dur="1" fill="hold">
-                                          <p:stCondLst>
-                                            <p:cond delay="0"/>
-                                          </p:stCondLst>
-                                        </p:cTn>
-                                        <p:tgtEl>
-                                          <p:spTgt spid="9"/>
-                                        </p:tgtEl>
-                                        <p:attrNameLst>
-                                          <p:attrName>style.visibility</p:attrName>
-                                        </p:attrNameLst>
-                                      </p:cBhvr>
-                                      <p:to>
-                                        <p:strVal val="visible"/>
-                                      </p:to>
-                                    </p:set>
-                                    <p:anim calcmode="lin" valueType="num">
-                                      <p:cBhvr additive="base">
-                                        <p:cTn id="40" dur="420" fill="hold"/>
-                                        <p:tgtEl>
-                                          <p:spTgt spid="9"/>
-                                        </p:tgtEl>
-                                        <p:attrNameLst>
-                                          <p:attrName>ppt_w</p:attrName>
-                                        </p:attrNameLst>
-                                      </p:cBhvr>
-                                      <p:tavLst>
-                                        <p:tav tm="0">
-                                          <p:val>
-                                            <p:strVal val="0"/>
-                                          </p:val>
-                                        </p:tav>
-                                        <p:tav tm="100000">
-                                          <p:val>
-                                            <p:strVal val="#ppt_w"/>
-                                          </p:val>
-                                        </p:tav>
-                                      </p:tavLst>
-                                    </p:anim>
-                                    <p:anim calcmode="lin" valueType="num">
-                                      <p:cBhvr additive="base">
-                                        <p:cTn id="41" dur="420" fill="hold"/>
-                                        <p:tgtEl>
-                                          <p:spTgt spid="9"/>
-                                        </p:tgtEl>
-                                        <p:attrNameLst>
-                                          <p:attrName>ppt_h</p:attrName>
-                                        </p:attrNameLst>
-                                      </p:cBhvr>
-                                      <p:tavLst>
-                                        <p:tav tm="0">
-                                          <p:val>
-                                            <p:strVal val="0"/>
-                                          </p:val>
-                                        </p:tav>
-                                        <p:tav tm="100000">
-                                          <p:val>
-                                            <p:strVal val="#ppt_h"/>
-                                          </p:val>
-                                        </p:tav>
-                                      </p:tavLst>
-                                    </p:anim>
-                                    <p:animEffect transition="in" filter="fade">
-                                      <p:cBhvr>
-                                        <p:cTn id="42" dur="420"/>
-                                        <p:tgtEl>
-                                          <p:spTgt spid="9"/>
-                                        </p:tgtEl>
-                                      </p:cBhvr>
-                                    </p:animEffect>
                                   </p:childTnLst>
                                 </p:cTn>
                               </p:par>
@@ -4932,8 +3952,8 @@
         </p:blipFill>
         <p:spPr>
           <a:xfrm>
-            <a:off x="426709" y="2636454"/>
-            <a:ext cx="6842588" cy="1280127"/>
+            <a:off x="426709" y="1417284"/>
+            <a:ext cx="11338276" cy="1356326"/>
           </a:xfrm>
           <a:prstGeom prst="rect">
             <a:avLst/>
@@ -4942,7 +3962,7 @@
       </p:pic>
       <p:pic>
         <p:nvPicPr>
-          <p:cNvPr id="4" name="Picture 3" descr="c11_1_1.jpg"/>
+          <p:cNvPr id="4" name="Picture 3" descr="c11_2_0.jpg"/>
           <p:cNvPicPr>
             <a:picLocks noChangeAspect="1"/>
           </p:cNvPicPr>
@@ -4956,18 +3976,138 @@
         </p:blipFill>
         <p:spPr>
           <a:xfrm>
-            <a:off x="9418084" y="3550831"/>
-            <a:ext cx="1965910" cy="2499297"/>
+            <a:off x="3627029" y="1645878"/>
+            <a:ext cx="1508722" cy="822939"/>
           </a:xfrm>
           <a:prstGeom prst="rect">
             <a:avLst/>
           </a:prstGeom>
         </p:spPr>
       </p:pic>
+      <p:pic>
+        <p:nvPicPr>
+          <p:cNvPr id="5" name="Picture 4" descr="c11_3_0.jpg"/>
+          <p:cNvPicPr>
+            <a:picLocks noChangeAspect="1"/>
+          </p:cNvPicPr>
+          <p:nvPr/>
+        </p:nvPicPr>
+        <p:blipFill>
+          <a:blip r:embed="rId5"/>
+          <a:stretch>
+            <a:fillRect/>
+          </a:stretch>
+        </p:blipFill>
+        <p:spPr>
+          <a:xfrm>
+            <a:off x="426709" y="2712652"/>
+            <a:ext cx="11338276" cy="1356326"/>
+          </a:xfrm>
+          <a:prstGeom prst="rect">
+            <a:avLst/>
+          </a:prstGeom>
+        </p:spPr>
+      </p:pic>
+      <p:pic>
+        <p:nvPicPr>
+          <p:cNvPr id="6" name="Picture 5" descr="c11_4_0.jpg"/>
+          <p:cNvPicPr>
+            <a:picLocks noChangeAspect="1"/>
+          </p:cNvPicPr>
+          <p:nvPr/>
+        </p:nvPicPr>
+        <p:blipFill>
+          <a:blip r:embed="rId6"/>
+          <a:stretch>
+            <a:fillRect/>
+          </a:stretch>
+        </p:blipFill>
+        <p:spPr>
+          <a:xfrm>
+            <a:off x="3855623" y="2941246"/>
+            <a:ext cx="1508722" cy="822939"/>
+          </a:xfrm>
+          <a:prstGeom prst="rect">
+            <a:avLst/>
+          </a:prstGeom>
+        </p:spPr>
+      </p:pic>
+      <p:pic>
+        <p:nvPicPr>
+          <p:cNvPr id="7" name="Picture 6" descr="c11_5_0.jpg"/>
+          <p:cNvPicPr>
+            <a:picLocks noChangeAspect="1"/>
+          </p:cNvPicPr>
+          <p:nvPr/>
+        </p:nvPicPr>
+        <p:blipFill>
+          <a:blip r:embed="rId7"/>
+          <a:stretch>
+            <a:fillRect/>
+          </a:stretch>
+        </p:blipFill>
+        <p:spPr>
+          <a:xfrm>
+            <a:off x="426709" y="4008019"/>
+            <a:ext cx="11338276" cy="1356326"/>
+          </a:xfrm>
+          <a:prstGeom prst="rect">
+            <a:avLst/>
+          </a:prstGeom>
+        </p:spPr>
+      </p:pic>
+      <p:pic>
+        <p:nvPicPr>
+          <p:cNvPr id="8" name="Picture 7" descr="c11_6_0.jpg"/>
+          <p:cNvPicPr>
+            <a:picLocks noChangeAspect="1"/>
+          </p:cNvPicPr>
+          <p:nvPr/>
+        </p:nvPicPr>
+        <p:blipFill>
+          <a:blip r:embed="rId8"/>
+          <a:stretch>
+            <a:fillRect/>
+          </a:stretch>
+        </p:blipFill>
+        <p:spPr>
+          <a:xfrm>
+            <a:off x="4008019" y="4236614"/>
+            <a:ext cx="1508722" cy="822939"/>
+          </a:xfrm>
+          <a:prstGeom prst="rect">
+            <a:avLst/>
+          </a:prstGeom>
+        </p:spPr>
+      </p:pic>
+      <p:pic>
+        <p:nvPicPr>
+          <p:cNvPr id="9" name="Picture 8" descr="c11_7_0.jpg"/>
+          <p:cNvPicPr>
+            <a:picLocks noChangeAspect="1"/>
+          </p:cNvPicPr>
+          <p:nvPr/>
+        </p:nvPicPr>
+        <p:blipFill>
+          <a:blip r:embed="rId9"/>
+          <a:stretch>
+            <a:fillRect/>
+          </a:stretch>
+        </p:blipFill>
+        <p:spPr>
+          <a:xfrm>
+            <a:off x="7665528" y="45718"/>
+            <a:ext cx="4099457" cy="1661118"/>
+          </a:xfrm>
+          <a:prstGeom prst="rect">
+            <a:avLst/>
+          </a:prstGeom>
+        </p:spPr>
+      </p:pic>
       <p:sp>
         <p:nvSpPr>
-          <p:cNvPr id="5" name="TextBox 4">
-            <a:hlinkClick action="ppaction://hlinksldjump" r:id="rId5"/>
+          <p:cNvPr id="10" name="TextBox 9">
+            <a:hlinkClick action="ppaction://hlinksldjump" r:id="rId10"/>
           </p:cNvPr>
           <p:cNvSpPr txBox="1"/>
           <p:nvPr/>
@@ -5010,6 +4150,699 @@
   </p:clrMapOvr>
   <p:transition spd="med">
     <p:cover dir="l"/>
+  </p:transition>
+  <p:timing>
+    <p:tnLst>
+      <p:par>
+        <p:cTn id="1" dur="indefinite" restart="never" nodeType="tmRoot">
+          <p:childTnLst>
+            <p:seq concurrent="1" nextAc="seek">
+              <p:cTn id="2" dur="indefinite" nodeType="mainSeq">
+                <p:childTnLst>
+                  <p:par>
+                    <p:cTn id="3" fill="hold">
+                      <p:stCondLst>
+                        <p:cond delay="indefinite"/>
+                      </p:stCondLst>
+                      <p:childTnLst>
+                        <p:par>
+                          <p:cTn id="4" fill="hold">
+                            <p:stCondLst>
+                              <p:cond delay="0"/>
+                            </p:stCondLst>
+                            <p:childTnLst>
+                              <p:par>
+                                <p:cTn id="5" presetID="2" presetClass="entr" presetSubtype="8" fill="hold" decel="100000" grpId="0" nodeType="clickEffect">
+                                  <p:stCondLst>
+                                    <p:cond delay="0"/>
+                                  </p:stCondLst>
+                                  <p:childTnLst>
+                                    <p:set>
+                                      <p:cBhvr>
+                                        <p:cTn id="6" dur="1" fill="hold">
+                                          <p:stCondLst>
+                                            <p:cond delay="0"/>
+                                          </p:stCondLst>
+                                        </p:cTn>
+                                        <p:tgtEl>
+                                          <p:spTgt spid="3"/>
+                                        </p:tgtEl>
+                                        <p:attrNameLst>
+                                          <p:attrName>style.visibility</p:attrName>
+                                        </p:attrNameLst>
+                                      </p:cBhvr>
+                                      <p:to>
+                                        <p:strVal val="visible"/>
+                                      </p:to>
+                                    </p:set>
+                                    <p:anim calcmode="lin" valueType="num">
+                                      <p:cBhvr additive="base">
+                                        <p:cTn id="7" dur="550" fill="hold"/>
+                                        <p:tgtEl>
+                                          <p:spTgt spid="3"/>
+                                        </p:tgtEl>
+                                        <p:attrNameLst>
+                                          <p:attrName>ppt_x</p:attrName>
+                                        </p:attrNameLst>
+                                      </p:cBhvr>
+                                      <p:tavLst>
+                                        <p:tav tm="0">
+                                          <p:val>
+                                            <p:strVal val="0-#ppt_w/2"/>
+                                          </p:val>
+                                        </p:tav>
+                                        <p:tav tm="100000">
+                                          <p:val>
+                                            <p:strVal val="#ppt_x"/>
+                                          </p:val>
+                                        </p:tav>
+                                      </p:tavLst>
+                                    </p:anim>
+                                    <p:anim calcmode="lin" valueType="num">
+                                      <p:cBhvr additive="base">
+                                        <p:cTn id="8" dur="550" fill="hold"/>
+                                        <p:tgtEl>
+                                          <p:spTgt spid="3"/>
+                                        </p:tgtEl>
+                                        <p:attrNameLst>
+                                          <p:attrName>ppt_y</p:attrName>
+                                        </p:attrNameLst>
+                                      </p:cBhvr>
+                                      <p:tavLst>
+                                        <p:tav tm="0">
+                                          <p:val>
+                                            <p:strVal val="#ppt_y"/>
+                                          </p:val>
+                                        </p:tav>
+                                        <p:tav tm="100000">
+                                          <p:val>
+                                            <p:strVal val="#ppt_y"/>
+                                          </p:val>
+                                        </p:tav>
+                                      </p:tavLst>
+                                    </p:anim>
+                                  </p:childTnLst>
+                                </p:cTn>
+                              </p:par>
+                            </p:childTnLst>
+                          </p:cTn>
+                        </p:par>
+                      </p:childTnLst>
+                    </p:cTn>
+                  </p:par>
+                  <p:par>
+                    <p:cTn id="9" fill="hold">
+                      <p:stCondLst>
+                        <p:cond delay="indefinite"/>
+                      </p:stCondLst>
+                      <p:childTnLst>
+                        <p:par>
+                          <p:cTn id="10" fill="hold">
+                            <p:stCondLst>
+                              <p:cond delay="0"/>
+                            </p:stCondLst>
+                            <p:childTnLst>
+                              <p:par>
+                                <p:cTn id="11" presetID="10" presetClass="entr" presetSubtype="0" fill="hold" grpId="0" nodeType="clickEffect">
+                                  <p:stCondLst>
+                                    <p:cond delay="0"/>
+                                  </p:stCondLst>
+                                  <p:childTnLst>
+                                    <p:set>
+                                      <p:cBhvr>
+                                        <p:cTn id="12" dur="1" fill="hold">
+                                          <p:stCondLst>
+                                            <p:cond delay="0"/>
+                                          </p:stCondLst>
+                                        </p:cTn>
+                                        <p:tgtEl>
+                                          <p:spTgt spid="4"/>
+                                        </p:tgtEl>
+                                        <p:attrNameLst>
+                                          <p:attrName>style.visibility</p:attrName>
+                                        </p:attrNameLst>
+                                      </p:cBhvr>
+                                      <p:to>
+                                        <p:strVal val="visible"/>
+                                      </p:to>
+                                    </p:set>
+                                    <p:animEffect transition="in" filter="fade">
+                                      <p:cBhvr>
+                                        <p:cTn id="13" dur="450"/>
+                                        <p:tgtEl>
+                                          <p:spTgt spid="4"/>
+                                        </p:tgtEl>
+                                      </p:cBhvr>
+                                    </p:animEffect>
+                                  </p:childTnLst>
+                                </p:cTn>
+                              </p:par>
+                            </p:childTnLst>
+                          </p:cTn>
+                        </p:par>
+                      </p:childTnLst>
+                    </p:cTn>
+                  </p:par>
+                  <p:par>
+                    <p:cTn id="14" fill="hold">
+                      <p:stCondLst>
+                        <p:cond delay="indefinite"/>
+                      </p:stCondLst>
+                      <p:childTnLst>
+                        <p:par>
+                          <p:cTn id="15" fill="hold">
+                            <p:stCondLst>
+                              <p:cond delay="0"/>
+                            </p:stCondLst>
+                            <p:childTnLst>
+                              <p:par>
+                                <p:cTn id="16" presetID="2" presetClass="entr" presetSubtype="8" fill="hold" decel="100000" grpId="0" nodeType="clickEffect">
+                                  <p:stCondLst>
+                                    <p:cond delay="0"/>
+                                  </p:stCondLst>
+                                  <p:childTnLst>
+                                    <p:set>
+                                      <p:cBhvr>
+                                        <p:cTn id="17" dur="1" fill="hold">
+                                          <p:stCondLst>
+                                            <p:cond delay="0"/>
+                                          </p:stCondLst>
+                                        </p:cTn>
+                                        <p:tgtEl>
+                                          <p:spTgt spid="5"/>
+                                        </p:tgtEl>
+                                        <p:attrNameLst>
+                                          <p:attrName>style.visibility</p:attrName>
+                                        </p:attrNameLst>
+                                      </p:cBhvr>
+                                      <p:to>
+                                        <p:strVal val="visible"/>
+                                      </p:to>
+                                    </p:set>
+                                    <p:anim calcmode="lin" valueType="num">
+                                      <p:cBhvr additive="base">
+                                        <p:cTn id="18" dur="550" fill="hold"/>
+                                        <p:tgtEl>
+                                          <p:spTgt spid="5"/>
+                                        </p:tgtEl>
+                                        <p:attrNameLst>
+                                          <p:attrName>ppt_x</p:attrName>
+                                        </p:attrNameLst>
+                                      </p:cBhvr>
+                                      <p:tavLst>
+                                        <p:tav tm="0">
+                                          <p:val>
+                                            <p:strVal val="0-#ppt_w/2"/>
+                                          </p:val>
+                                        </p:tav>
+                                        <p:tav tm="100000">
+                                          <p:val>
+                                            <p:strVal val="#ppt_x"/>
+                                          </p:val>
+                                        </p:tav>
+                                      </p:tavLst>
+                                    </p:anim>
+                                    <p:anim calcmode="lin" valueType="num">
+                                      <p:cBhvr additive="base">
+                                        <p:cTn id="19" dur="550" fill="hold"/>
+                                        <p:tgtEl>
+                                          <p:spTgt spid="5"/>
+                                        </p:tgtEl>
+                                        <p:attrNameLst>
+                                          <p:attrName>ppt_y</p:attrName>
+                                        </p:attrNameLst>
+                                      </p:cBhvr>
+                                      <p:tavLst>
+                                        <p:tav tm="0">
+                                          <p:val>
+                                            <p:strVal val="#ppt_y"/>
+                                          </p:val>
+                                        </p:tav>
+                                        <p:tav tm="100000">
+                                          <p:val>
+                                            <p:strVal val="#ppt_y"/>
+                                          </p:val>
+                                        </p:tav>
+                                      </p:tavLst>
+                                    </p:anim>
+                                  </p:childTnLst>
+                                </p:cTn>
+                              </p:par>
+                            </p:childTnLst>
+                          </p:cTn>
+                        </p:par>
+                      </p:childTnLst>
+                    </p:cTn>
+                  </p:par>
+                  <p:par>
+                    <p:cTn id="20" fill="hold">
+                      <p:stCondLst>
+                        <p:cond delay="indefinite"/>
+                      </p:stCondLst>
+                      <p:childTnLst>
+                        <p:par>
+                          <p:cTn id="21" fill="hold">
+                            <p:stCondLst>
+                              <p:cond delay="0"/>
+                            </p:stCondLst>
+                            <p:childTnLst>
+                              <p:par>
+                                <p:cTn id="22" presetID="10" presetClass="entr" presetSubtype="0" fill="hold" grpId="0" nodeType="clickEffect">
+                                  <p:stCondLst>
+                                    <p:cond delay="0"/>
+                                  </p:stCondLst>
+                                  <p:childTnLst>
+                                    <p:set>
+                                      <p:cBhvr>
+                                        <p:cTn id="23" dur="1" fill="hold">
+                                          <p:stCondLst>
+                                            <p:cond delay="0"/>
+                                          </p:stCondLst>
+                                        </p:cTn>
+                                        <p:tgtEl>
+                                          <p:spTgt spid="6"/>
+                                        </p:tgtEl>
+                                        <p:attrNameLst>
+                                          <p:attrName>style.visibility</p:attrName>
+                                        </p:attrNameLst>
+                                      </p:cBhvr>
+                                      <p:to>
+                                        <p:strVal val="visible"/>
+                                      </p:to>
+                                    </p:set>
+                                    <p:animEffect transition="in" filter="fade">
+                                      <p:cBhvr>
+                                        <p:cTn id="24" dur="450"/>
+                                        <p:tgtEl>
+                                          <p:spTgt spid="6"/>
+                                        </p:tgtEl>
+                                      </p:cBhvr>
+                                    </p:animEffect>
+                                  </p:childTnLst>
+                                </p:cTn>
+                              </p:par>
+                            </p:childTnLst>
+                          </p:cTn>
+                        </p:par>
+                      </p:childTnLst>
+                    </p:cTn>
+                  </p:par>
+                  <p:par>
+                    <p:cTn id="25" fill="hold">
+                      <p:stCondLst>
+                        <p:cond delay="indefinite"/>
+                      </p:stCondLst>
+                      <p:childTnLst>
+                        <p:par>
+                          <p:cTn id="26" fill="hold">
+                            <p:stCondLst>
+                              <p:cond delay="0"/>
+                            </p:stCondLst>
+                            <p:childTnLst>
+                              <p:par>
+                                <p:cTn id="27" presetID="2" presetClass="entr" presetSubtype="8" fill="hold" decel="100000" grpId="0" nodeType="clickEffect">
+                                  <p:stCondLst>
+                                    <p:cond delay="0"/>
+                                  </p:stCondLst>
+                                  <p:childTnLst>
+                                    <p:set>
+                                      <p:cBhvr>
+                                        <p:cTn id="28" dur="1" fill="hold">
+                                          <p:stCondLst>
+                                            <p:cond delay="0"/>
+                                          </p:stCondLst>
+                                        </p:cTn>
+                                        <p:tgtEl>
+                                          <p:spTgt spid="7"/>
+                                        </p:tgtEl>
+                                        <p:attrNameLst>
+                                          <p:attrName>style.visibility</p:attrName>
+                                        </p:attrNameLst>
+                                      </p:cBhvr>
+                                      <p:to>
+                                        <p:strVal val="visible"/>
+                                      </p:to>
+                                    </p:set>
+                                    <p:anim calcmode="lin" valueType="num">
+                                      <p:cBhvr additive="base">
+                                        <p:cTn id="29" dur="550" fill="hold"/>
+                                        <p:tgtEl>
+                                          <p:spTgt spid="7"/>
+                                        </p:tgtEl>
+                                        <p:attrNameLst>
+                                          <p:attrName>ppt_x</p:attrName>
+                                        </p:attrNameLst>
+                                      </p:cBhvr>
+                                      <p:tavLst>
+                                        <p:tav tm="0">
+                                          <p:val>
+                                            <p:strVal val="0-#ppt_w/2"/>
+                                          </p:val>
+                                        </p:tav>
+                                        <p:tav tm="100000">
+                                          <p:val>
+                                            <p:strVal val="#ppt_x"/>
+                                          </p:val>
+                                        </p:tav>
+                                      </p:tavLst>
+                                    </p:anim>
+                                    <p:anim calcmode="lin" valueType="num">
+                                      <p:cBhvr additive="base">
+                                        <p:cTn id="30" dur="550" fill="hold"/>
+                                        <p:tgtEl>
+                                          <p:spTgt spid="7"/>
+                                        </p:tgtEl>
+                                        <p:attrNameLst>
+                                          <p:attrName>ppt_y</p:attrName>
+                                        </p:attrNameLst>
+                                      </p:cBhvr>
+                                      <p:tavLst>
+                                        <p:tav tm="0">
+                                          <p:val>
+                                            <p:strVal val="#ppt_y"/>
+                                          </p:val>
+                                        </p:tav>
+                                        <p:tav tm="100000">
+                                          <p:val>
+                                            <p:strVal val="#ppt_y"/>
+                                          </p:val>
+                                        </p:tav>
+                                      </p:tavLst>
+                                    </p:anim>
+                                  </p:childTnLst>
+                                </p:cTn>
+                              </p:par>
+                            </p:childTnLst>
+                          </p:cTn>
+                        </p:par>
+                      </p:childTnLst>
+                    </p:cTn>
+                  </p:par>
+                  <p:par>
+                    <p:cTn id="31" fill="hold">
+                      <p:stCondLst>
+                        <p:cond delay="indefinite"/>
+                      </p:stCondLst>
+                      <p:childTnLst>
+                        <p:par>
+                          <p:cTn id="32" fill="hold">
+                            <p:stCondLst>
+                              <p:cond delay="0"/>
+                            </p:stCondLst>
+                            <p:childTnLst>
+                              <p:par>
+                                <p:cTn id="33" presetID="10" presetClass="entr" presetSubtype="0" fill="hold" grpId="0" nodeType="clickEffect">
+                                  <p:stCondLst>
+                                    <p:cond delay="0"/>
+                                  </p:stCondLst>
+                                  <p:childTnLst>
+                                    <p:set>
+                                      <p:cBhvr>
+                                        <p:cTn id="34" dur="1" fill="hold">
+                                          <p:stCondLst>
+                                            <p:cond delay="0"/>
+                                          </p:stCondLst>
+                                        </p:cTn>
+                                        <p:tgtEl>
+                                          <p:spTgt spid="8"/>
+                                        </p:tgtEl>
+                                        <p:attrNameLst>
+                                          <p:attrName>style.visibility</p:attrName>
+                                        </p:attrNameLst>
+                                      </p:cBhvr>
+                                      <p:to>
+                                        <p:strVal val="visible"/>
+                                      </p:to>
+                                    </p:set>
+                                    <p:animEffect transition="in" filter="fade">
+                                      <p:cBhvr>
+                                        <p:cTn id="35" dur="450"/>
+                                        <p:tgtEl>
+                                          <p:spTgt spid="8"/>
+                                        </p:tgtEl>
+                                      </p:cBhvr>
+                                    </p:animEffect>
+                                  </p:childTnLst>
+                                </p:cTn>
+                              </p:par>
+                            </p:childTnLst>
+                          </p:cTn>
+                        </p:par>
+                      </p:childTnLst>
+                    </p:cTn>
+                  </p:par>
+                  <p:par>
+                    <p:cTn id="36" fill="hold">
+                      <p:stCondLst>
+                        <p:cond delay="indefinite"/>
+                      </p:stCondLst>
+                      <p:childTnLst>
+                        <p:par>
+                          <p:cTn id="37" fill="hold">
+                            <p:stCondLst>
+                              <p:cond delay="0"/>
+                            </p:stCondLst>
+                            <p:childTnLst>
+                              <p:par>
+                                <p:cTn id="38" presetID="53" presetClass="entr" presetSubtype="16" fill="hold" grpId="0" nodeType="clickEffect">
+                                  <p:stCondLst>
+                                    <p:cond delay="0"/>
+                                  </p:stCondLst>
+                                  <p:childTnLst>
+                                    <p:set>
+                                      <p:cBhvr>
+                                        <p:cTn id="39" dur="1" fill="hold">
+                                          <p:stCondLst>
+                                            <p:cond delay="0"/>
+                                          </p:stCondLst>
+                                        </p:cTn>
+                                        <p:tgtEl>
+                                          <p:spTgt spid="9"/>
+                                        </p:tgtEl>
+                                        <p:attrNameLst>
+                                          <p:attrName>style.visibility</p:attrName>
+                                        </p:attrNameLst>
+                                      </p:cBhvr>
+                                      <p:to>
+                                        <p:strVal val="visible"/>
+                                      </p:to>
+                                    </p:set>
+                                    <p:anim calcmode="lin" valueType="num">
+                                      <p:cBhvr additive="base">
+                                        <p:cTn id="40" dur="420" fill="hold"/>
+                                        <p:tgtEl>
+                                          <p:spTgt spid="9"/>
+                                        </p:tgtEl>
+                                        <p:attrNameLst>
+                                          <p:attrName>ppt_w</p:attrName>
+                                        </p:attrNameLst>
+                                      </p:cBhvr>
+                                      <p:tavLst>
+                                        <p:tav tm="0">
+                                          <p:val>
+                                            <p:strVal val="0"/>
+                                          </p:val>
+                                        </p:tav>
+                                        <p:tav tm="100000">
+                                          <p:val>
+                                            <p:strVal val="#ppt_w"/>
+                                          </p:val>
+                                        </p:tav>
+                                      </p:tavLst>
+                                    </p:anim>
+                                    <p:anim calcmode="lin" valueType="num">
+                                      <p:cBhvr additive="base">
+                                        <p:cTn id="41" dur="420" fill="hold"/>
+                                        <p:tgtEl>
+                                          <p:spTgt spid="9"/>
+                                        </p:tgtEl>
+                                        <p:attrNameLst>
+                                          <p:attrName>ppt_h</p:attrName>
+                                        </p:attrNameLst>
+                                      </p:cBhvr>
+                                      <p:tavLst>
+                                        <p:tav tm="0">
+                                          <p:val>
+                                            <p:strVal val="0"/>
+                                          </p:val>
+                                        </p:tav>
+                                        <p:tav tm="100000">
+                                          <p:val>
+                                            <p:strVal val="#ppt_h"/>
+                                          </p:val>
+                                        </p:tav>
+                                      </p:tavLst>
+                                    </p:anim>
+                                    <p:animEffect transition="in" filter="fade">
+                                      <p:cBhvr>
+                                        <p:cTn id="42" dur="420"/>
+                                        <p:tgtEl>
+                                          <p:spTgt spid="9"/>
+                                        </p:tgtEl>
+                                      </p:cBhvr>
+                                    </p:animEffect>
+                                  </p:childTnLst>
+                                </p:cTn>
+                              </p:par>
+                            </p:childTnLst>
+                          </p:cTn>
+                        </p:par>
+                      </p:childTnLst>
+                    </p:cTn>
+                  </p:par>
+                </p:childTnLst>
+              </p:cTn>
+              <p:prevCondLst>
+                <p:cond evt="onPrev" delay="0">
+                  <p:tgtEl>
+                    <p:sldTgt/>
+                  </p:tgtEl>
+                </p:cond>
+              </p:prevCondLst>
+              <p:nextCondLst>
+                <p:cond evt="onNext" delay="0">
+                  <p:tgtEl>
+                    <p:sldTgt/>
+                  </p:tgtEl>
+                </p:cond>
+              </p:nextCondLst>
+            </p:seq>
+          </p:childTnLst>
+        </p:cTn>
+      </p:par>
+    </p:tnLst>
+  </p:timing>
+</p:sld>
+</file>
+
+<file path=ppt/slides/slide13.xml><?xml version="1.0" encoding="utf-8"?>
+<p:sld xmlns:a="http://schemas.openxmlformats.org/drawingml/2006/main" xmlns:p="http://schemas.openxmlformats.org/presentationml/2006/main" xmlns:r="http://schemas.openxmlformats.org/officeDocument/2006/relationships">
+  <p:cSld>
+    <p:spTree>
+      <p:nvGrpSpPr>
+        <p:cNvPr id="1" name=""/>
+        <p:cNvGrpSpPr/>
+        <p:nvPr/>
+      </p:nvGrpSpPr>
+      <p:grpSpPr/>
+      <p:pic>
+        <p:nvPicPr>
+          <p:cNvPr id="2" name="Picture 1" descr="b12.jpg"/>
+          <p:cNvPicPr>
+            <a:picLocks noChangeAspect="1"/>
+          </p:cNvPicPr>
+          <p:nvPr/>
+        </p:nvPicPr>
+        <p:blipFill>
+          <a:blip r:embed="rId2"/>
+          <a:stretch>
+            <a:fillRect/>
+          </a:stretch>
+        </p:blipFill>
+        <p:spPr>
+          <a:xfrm>
+            <a:off x="0" y="0"/>
+            <a:ext cx="12191695" cy="6857828"/>
+          </a:xfrm>
+          <a:prstGeom prst="rect">
+            <a:avLst/>
+          </a:prstGeom>
+        </p:spPr>
+      </p:pic>
+      <p:pic>
+        <p:nvPicPr>
+          <p:cNvPr id="3" name="Picture 2" descr="c12_1_0.jpg"/>
+          <p:cNvPicPr>
+            <a:picLocks noChangeAspect="1"/>
+          </p:cNvPicPr>
+          <p:nvPr/>
+        </p:nvPicPr>
+        <p:blipFill>
+          <a:blip r:embed="rId3"/>
+          <a:stretch>
+            <a:fillRect/>
+          </a:stretch>
+        </p:blipFill>
+        <p:spPr>
+          <a:xfrm>
+            <a:off x="426709" y="2636454"/>
+            <a:ext cx="6842588" cy="1280127"/>
+          </a:xfrm>
+          <a:prstGeom prst="rect">
+            <a:avLst/>
+          </a:prstGeom>
+        </p:spPr>
+      </p:pic>
+      <p:pic>
+        <p:nvPicPr>
+          <p:cNvPr id="4" name="Picture 3" descr="c12_1_1.jpg"/>
+          <p:cNvPicPr>
+            <a:picLocks noChangeAspect="1"/>
+          </p:cNvPicPr>
+          <p:nvPr/>
+        </p:nvPicPr>
+        <p:blipFill>
+          <a:blip r:embed="rId4"/>
+          <a:stretch>
+            <a:fillRect/>
+          </a:stretch>
+        </p:blipFill>
+        <p:spPr>
+          <a:xfrm>
+            <a:off x="9418084" y="3550831"/>
+            <a:ext cx="1965910" cy="2499297"/>
+          </a:xfrm>
+          <a:prstGeom prst="rect">
+            <a:avLst/>
+          </a:prstGeom>
+        </p:spPr>
+      </p:pic>
+      <p:sp>
+        <p:nvSpPr>
+          <p:cNvPr id="5" name="TextBox 4">
+            <a:hlinkClick action="ppaction://hlinksldjump" r:id="rId5"/>
+          </p:cNvPr>
+          <p:cNvSpPr txBox="1"/>
+          <p:nvPr/>
+        </p:nvSpPr>
+        <p:spPr>
+          <a:xfrm>
+            <a:off x="11048723" y="76198"/>
+            <a:ext cx="1066773" cy="304792"/>
+          </a:xfrm>
+          <a:prstGeom prst="rect">
+            <a:avLst/>
+          </a:prstGeom>
+          <a:noFill/>
+        </p:spPr>
+        <p:txBody>
+          <a:bodyPr wrap="none">
+            <a:spAutoFit/>
+          </a:bodyPr>
+          <a:lstStyle/>
+          <a:p>
+            <a:pPr algn="r"/>
+            <a:r>
+              <a:rPr sz="1200" b="0">
+                <a:solidFill>
+                  <a:srgbClr val="8A8F96"/>
+                </a:solidFill>
+                <a:latin typeface="微軟正黑體"/>
+                <a:ea typeface="微軟正黑體"/>
+                <a:cs typeface="微軟正黑體"/>
+              </a:rPr>
+              <a:t>流程 ↩</a:t>
+            </a:r>
+          </a:p>
+        </p:txBody>
+      </p:sp>
+    </p:spTree>
+  </p:cSld>
+  <p:clrMapOvr>
+    <a:masterClrMapping/>
+  </p:clrMapOvr>
+  <p:transition spd="med">
+    <p:fade/>
   </p:transition>
   <p:timing>
     <p:tnLst>
@@ -5457,7 +5290,7 @@
       <p:sp>
         <p:nvSpPr>
           <p:cNvPr id="9" name="Rectangle 8">
-            <a:hlinkClick action="ppaction://hlinksldjump" r:id="rId9"/>
+            <a:hlinkClick r:id="rId9"/>
           </p:cNvPr>
           <p:cNvSpPr/>
           <p:nvPr/>
@@ -6487,8 +6320,8 @@
         </p:blipFill>
         <p:spPr>
           <a:xfrm>
-            <a:off x="426709" y="2103067"/>
-            <a:ext cx="7680767" cy="2804089"/>
+            <a:off x="426709" y="1417284"/>
+            <a:ext cx="1965910" cy="822939"/>
           </a:xfrm>
           <a:prstGeom prst="rect">
             <a:avLst/>
@@ -6511,8 +6344,8 @@
         </p:blipFill>
         <p:spPr>
           <a:xfrm>
-            <a:off x="350511" y="1722076"/>
-            <a:ext cx="11566870" cy="4099457"/>
+            <a:off x="426709" y="2026869"/>
+            <a:ext cx="1965910" cy="822939"/>
           </a:xfrm>
           <a:prstGeom prst="rect">
             <a:avLst/>
@@ -6535,18 +6368,42 @@
         </p:blipFill>
         <p:spPr>
           <a:xfrm>
-            <a:off x="0" y="5836773"/>
-            <a:ext cx="12191695" cy="1021054"/>
+            <a:off x="426709" y="2636454"/>
+            <a:ext cx="1965910" cy="822939"/>
           </a:xfrm>
           <a:prstGeom prst="rect">
             <a:avLst/>
           </a:prstGeom>
         </p:spPr>
       </p:pic>
+      <p:pic>
+        <p:nvPicPr>
+          <p:cNvPr id="6" name="Picture 5" descr="c3_4_0.jpg"/>
+          <p:cNvPicPr>
+            <a:picLocks noChangeAspect="1"/>
+          </p:cNvPicPr>
+          <p:nvPr/>
+        </p:nvPicPr>
+        <p:blipFill>
+          <a:blip r:embed="rId6"/>
+          <a:stretch>
+            <a:fillRect/>
+          </a:stretch>
+        </p:blipFill>
+        <p:spPr>
+          <a:xfrm>
+            <a:off x="0" y="5836773"/>
+            <a:ext cx="12191695" cy="1021054"/>
+          </a:xfrm>
+          <a:prstGeom prst="rect">
+            <a:avLst/>
+          </a:prstGeom>
+        </p:spPr>
+      </p:pic>
       <p:sp>
         <p:nvSpPr>
-          <p:cNvPr id="6" name="TextBox 5">
-            <a:hlinkClick action="ppaction://hlinksldjump" r:id="rId6"/>
+          <p:cNvPr id="7" name="TextBox 6">
+            <a:hlinkClick action="ppaction://hlinksldjump" r:id="rId7"/>
           </p:cNvPr>
           <p:cNvSpPr txBox="1"/>
           <p:nvPr/>
@@ -6611,7 +6468,7 @@
                             </p:stCondLst>
                             <p:childTnLst>
                               <p:par>
-                                <p:cTn id="5" presetID="2" presetClass="entr" presetSubtype="4" fill="hold" decel="100000" grpId="0" nodeType="clickEffect">
+                                <p:cTn id="5" presetID="2" presetClass="entr" presetSubtype="8" fill="hold" decel="100000" grpId="0" nodeType="clickEffect">
                                   <p:stCondLst>
                                     <p:cond delay="0"/>
                                   </p:stCondLst>
@@ -6647,7 +6504,7 @@
                                       <p:tavLst>
                                         <p:tav tm="0">
                                           <p:val>
-                                            <p:strVal val="#ppt_x"/>
+                                            <p:strVal val="0-#ppt_w/2"/>
                                           </p:val>
                                         </p:tav>
                                         <p:tav tm="100000">
@@ -6670,7 +6527,7 @@
                                       <p:tavLst>
                                         <p:tav tm="0">
                                           <p:val>
-                                            <p:strVal val="1+#ppt_h/2"/>
+                                            <p:strVal val="#ppt_y"/>
                                           </p:val>
                                         </p:tav>
                                         <p:tav tm="100000">
@@ -6702,7 +6559,7 @@
                             </p:stCondLst>
                             <p:childTnLst>
                               <p:par>
-                                <p:cTn id="11" presetID="10" presetClass="entr" presetSubtype="0" fill="hold" grpId="0" nodeType="clickEffect">
+                                <p:cTn id="11" presetID="2" presetClass="entr" presetSubtype="8" fill="hold" decel="100000" grpId="0" nodeType="clickEffect">
                                   <p:stCondLst>
                                     <p:cond delay="0"/>
                                   </p:stCondLst>
@@ -6725,14 +6582,52 @@
                                         <p:strVal val="visible"/>
                                       </p:to>
                                     </p:set>
-                                    <p:animEffect transition="in" filter="fade">
-                                      <p:cBhvr>
-                                        <p:cTn id="13" dur="500"/>
+                                    <p:anim calcmode="lin" valueType="num">
+                                      <p:cBhvr additive="base">
+                                        <p:cTn id="13" dur="550" fill="hold"/>
                                         <p:tgtEl>
                                           <p:spTgt spid="4"/>
                                         </p:tgtEl>
-                                      </p:cBhvr>
-                                    </p:animEffect>
+                                        <p:attrNameLst>
+                                          <p:attrName>ppt_x</p:attrName>
+                                        </p:attrNameLst>
+                                      </p:cBhvr>
+                                      <p:tavLst>
+                                        <p:tav tm="0">
+                                          <p:val>
+                                            <p:strVal val="0-#ppt_w/2"/>
+                                          </p:val>
+                                        </p:tav>
+                                        <p:tav tm="100000">
+                                          <p:val>
+                                            <p:strVal val="#ppt_x"/>
+                                          </p:val>
+                                        </p:tav>
+                                      </p:tavLst>
+                                    </p:anim>
+                                    <p:anim calcmode="lin" valueType="num">
+                                      <p:cBhvr additive="base">
+                                        <p:cTn id="14" dur="550" fill="hold"/>
+                                        <p:tgtEl>
+                                          <p:spTgt spid="4"/>
+                                        </p:tgtEl>
+                                        <p:attrNameLst>
+                                          <p:attrName>ppt_y</p:attrName>
+                                        </p:attrNameLst>
+                                      </p:cBhvr>
+                                      <p:tavLst>
+                                        <p:tav tm="0">
+                                          <p:val>
+                                            <p:strVal val="#ppt_y"/>
+                                          </p:val>
+                                        </p:tav>
+                                        <p:tav tm="100000">
+                                          <p:val>
+                                            <p:strVal val="#ppt_y"/>
+                                          </p:val>
+                                        </p:tav>
+                                      </p:tavLst>
+                                    </p:anim>
                                   </p:childTnLst>
                                 </p:cTn>
                               </p:par>
@@ -6743,26 +6638,26 @@
                     </p:cTn>
                   </p:par>
                   <p:par>
-                    <p:cTn id="14" fill="hold">
+                    <p:cTn id="15" fill="hold">
                       <p:stCondLst>
                         <p:cond delay="indefinite"/>
                       </p:stCondLst>
                       <p:childTnLst>
                         <p:par>
-                          <p:cTn id="15" fill="hold">
+                          <p:cTn id="16" fill="hold">
                             <p:stCondLst>
                               <p:cond delay="0"/>
                             </p:stCondLst>
                             <p:childTnLst>
                               <p:par>
-                                <p:cTn id="16" presetID="2" presetClass="entr" presetSubtype="4" fill="hold" decel="100000" grpId="0" nodeType="clickEffect">
+                                <p:cTn id="17" presetID="2" presetClass="entr" presetSubtype="8" fill="hold" decel="100000" grpId="0" nodeType="clickEffect">
                                   <p:stCondLst>
                                     <p:cond delay="0"/>
                                   </p:stCondLst>
                                   <p:childTnLst>
                                     <p:set>
                                       <p:cBhvr>
-                                        <p:cTn id="17" dur="1" fill="hold">
+                                        <p:cTn id="18" dur="1" fill="hold">
                                           <p:stCondLst>
                                             <p:cond delay="0"/>
                                           </p:stCondLst>
@@ -6780,7 +6675,7 @@
                                     </p:set>
                                     <p:anim calcmode="lin" valueType="num">
                                       <p:cBhvr additive="base">
-                                        <p:cTn id="18" dur="550" fill="hold"/>
+                                        <p:cTn id="19" dur="550" fill="hold"/>
                                         <p:tgtEl>
                                           <p:spTgt spid="5"/>
                                         </p:tgtEl>
@@ -6791,7 +6686,7 @@
                                       <p:tavLst>
                                         <p:tav tm="0">
                                           <p:val>
-                                            <p:strVal val="#ppt_x"/>
+                                            <p:strVal val="0-#ppt_w/2"/>
                                           </p:val>
                                         </p:tav>
                                         <p:tav tm="100000">
@@ -6803,7 +6698,7 @@
                                     </p:anim>
                                     <p:anim calcmode="lin" valueType="num">
                                       <p:cBhvr additive="base">
-                                        <p:cTn id="19" dur="550" fill="hold"/>
+                                        <p:cTn id="20" dur="550" fill="hold"/>
                                         <p:tgtEl>
                                           <p:spTgt spid="5"/>
                                         </p:tgtEl>
@@ -6814,7 +6709,7 @@
                                       <p:tavLst>
                                         <p:tav tm="0">
                                           <p:val>
-                                            <p:strVal val="1+#ppt_h/2"/>
+                                            <p:strVal val="#ppt_y"/>
                                           </p:val>
                                         </p:tav>
                                         <p:tav tm="100000">
@@ -6824,6 +6719,59 @@
                                         </p:tav>
                                       </p:tavLst>
                                     </p:anim>
+                                  </p:childTnLst>
+                                </p:cTn>
+                              </p:par>
+                            </p:childTnLst>
+                          </p:cTn>
+                        </p:par>
+                      </p:childTnLst>
+                    </p:cTn>
+                  </p:par>
+                  <p:par>
+                    <p:cTn id="21" fill="hold">
+                      <p:stCondLst>
+                        <p:cond delay="indefinite"/>
+                      </p:stCondLst>
+                      <p:childTnLst>
+                        <p:par>
+                          <p:cTn id="22" fill="hold">
+                            <p:stCondLst>
+                              <p:cond delay="0"/>
+                            </p:stCondLst>
+                            <p:childTnLst>
+                              <p:par>
+                                <p:cTn id="23" presetID="10" presetClass="entr" presetSubtype="0" fill="hold" grpId="0" nodeType="clickEffect">
+                                  <p:stCondLst>
+                                    <p:cond delay="0"/>
+                                  </p:stCondLst>
+                                  <p:childTnLst>
+                                    <p:set>
+                                      <p:cBhvr>
+                                        <p:cTn id="24" dur="1" fill="hold">
+                                          <p:stCondLst>
+                                            <p:cond delay="0"/>
+                                          </p:stCondLst>
+                                        </p:cTn>
+                                        <p:tgtEl>
+                                          <p:spTgt spid="6"/>
+                                        </p:tgtEl>
+                                        <p:attrNameLst>
+                                          <p:attrName>style.visibility</p:attrName>
+                                        </p:attrNameLst>
+                                      </p:cBhvr>
+                                      <p:to>
+                                        <p:strVal val="visible"/>
+                                      </p:to>
+                                    </p:set>
+                                    <p:animEffect transition="in" filter="fade">
+                                      <p:cBhvr>
+                                        <p:cTn id="25" dur="450"/>
+                                        <p:tgtEl>
+                                          <p:spTgt spid="6"/>
+                                        </p:tgtEl>
+                                      </p:cBhvr>
+                                    </p:animEffect>
                                   </p:childTnLst>
                                 </p:cTn>
                               </p:par>
@@ -7004,18 +6952,42 @@
         </p:blipFill>
         <p:spPr>
           <a:xfrm>
-            <a:off x="0" y="5836773"/>
-            <a:ext cx="12191695" cy="1021054"/>
+            <a:off x="426709" y="4998594"/>
+            <a:ext cx="6233004" cy="1203929"/>
           </a:xfrm>
           <a:prstGeom prst="rect">
             <a:avLst/>
           </a:prstGeom>
         </p:spPr>
       </p:pic>
+      <p:pic>
+        <p:nvPicPr>
+          <p:cNvPr id="8" name="Picture 7" descr="c4_6_0.jpg"/>
+          <p:cNvPicPr>
+            <a:picLocks noChangeAspect="1"/>
+          </p:cNvPicPr>
+          <p:nvPr/>
+        </p:nvPicPr>
+        <p:blipFill>
+          <a:blip r:embed="rId8"/>
+          <a:stretch>
+            <a:fillRect/>
+          </a:stretch>
+        </p:blipFill>
+        <p:spPr>
+          <a:xfrm>
+            <a:off x="0" y="5836773"/>
+            <a:ext cx="12191695" cy="1021054"/>
+          </a:xfrm>
+          <a:prstGeom prst="rect">
+            <a:avLst/>
+          </a:prstGeom>
+        </p:spPr>
+      </p:pic>
       <p:sp>
         <p:nvSpPr>
-          <p:cNvPr id="8" name="TextBox 7">
-            <a:hlinkClick action="ppaction://hlinksldjump" r:id="rId8"/>
+          <p:cNvPr id="9" name="TextBox 8">
+            <a:hlinkClick action="ppaction://hlinksldjump" r:id="rId9"/>
           </p:cNvPr>
           <p:cNvSpPr txBox="1"/>
           <p:nvPr/>
@@ -7406,7 +7378,7 @@
                             </p:stCondLst>
                             <p:childTnLst>
                               <p:par>
-                                <p:cTn id="28" presetID="2" presetClass="entr" presetSubtype="4" fill="hold" decel="100000" grpId="0" nodeType="clickEffect">
+                                <p:cTn id="28" presetID="2" presetClass="entr" presetSubtype="8" fill="hold" decel="100000" grpId="0" nodeType="clickEffect">
                                   <p:stCondLst>
                                     <p:cond delay="0"/>
                                   </p:stCondLst>
@@ -7442,7 +7414,7 @@
                                       <p:tavLst>
                                         <p:tav tm="0">
                                           <p:val>
-                                            <p:strVal val="#ppt_x"/>
+                                            <p:strVal val="0-#ppt_w/2"/>
                                           </p:val>
                                         </p:tav>
                                         <p:tav tm="100000">
@@ -7457,6 +7429,97 @@
                                         <p:cTn id="31" dur="550" fill="hold"/>
                                         <p:tgtEl>
                                           <p:spTgt spid="7"/>
+                                        </p:tgtEl>
+                                        <p:attrNameLst>
+                                          <p:attrName>ppt_y</p:attrName>
+                                        </p:attrNameLst>
+                                      </p:cBhvr>
+                                      <p:tavLst>
+                                        <p:tav tm="0">
+                                          <p:val>
+                                            <p:strVal val="#ppt_y"/>
+                                          </p:val>
+                                        </p:tav>
+                                        <p:tav tm="100000">
+                                          <p:val>
+                                            <p:strVal val="#ppt_y"/>
+                                          </p:val>
+                                        </p:tav>
+                                      </p:tavLst>
+                                    </p:anim>
+                                  </p:childTnLst>
+                                </p:cTn>
+                              </p:par>
+                            </p:childTnLst>
+                          </p:cTn>
+                        </p:par>
+                      </p:childTnLst>
+                    </p:cTn>
+                  </p:par>
+                  <p:par>
+                    <p:cTn id="32" fill="hold">
+                      <p:stCondLst>
+                        <p:cond delay="indefinite"/>
+                      </p:stCondLst>
+                      <p:childTnLst>
+                        <p:par>
+                          <p:cTn id="33" fill="hold">
+                            <p:stCondLst>
+                              <p:cond delay="0"/>
+                            </p:stCondLst>
+                            <p:childTnLst>
+                              <p:par>
+                                <p:cTn id="34" presetID="2" presetClass="entr" presetSubtype="4" fill="hold" decel="100000" grpId="0" nodeType="clickEffect">
+                                  <p:stCondLst>
+                                    <p:cond delay="0"/>
+                                  </p:stCondLst>
+                                  <p:childTnLst>
+                                    <p:set>
+                                      <p:cBhvr>
+                                        <p:cTn id="35" dur="1" fill="hold">
+                                          <p:stCondLst>
+                                            <p:cond delay="0"/>
+                                          </p:stCondLst>
+                                        </p:cTn>
+                                        <p:tgtEl>
+                                          <p:spTgt spid="8"/>
+                                        </p:tgtEl>
+                                        <p:attrNameLst>
+                                          <p:attrName>style.visibility</p:attrName>
+                                        </p:attrNameLst>
+                                      </p:cBhvr>
+                                      <p:to>
+                                        <p:strVal val="visible"/>
+                                      </p:to>
+                                    </p:set>
+                                    <p:anim calcmode="lin" valueType="num">
+                                      <p:cBhvr additive="base">
+                                        <p:cTn id="36" dur="550" fill="hold"/>
+                                        <p:tgtEl>
+                                          <p:spTgt spid="8"/>
+                                        </p:tgtEl>
+                                        <p:attrNameLst>
+                                          <p:attrName>ppt_x</p:attrName>
+                                        </p:attrNameLst>
+                                      </p:cBhvr>
+                                      <p:tavLst>
+                                        <p:tav tm="0">
+                                          <p:val>
+                                            <p:strVal val="#ppt_x"/>
+                                          </p:val>
+                                        </p:tav>
+                                        <p:tav tm="100000">
+                                          <p:val>
+                                            <p:strVal val="#ppt_x"/>
+                                          </p:val>
+                                        </p:tav>
+                                      </p:tavLst>
+                                    </p:anim>
+                                    <p:anim calcmode="lin" valueType="num">
+                                      <p:cBhvr additive="base">
+                                        <p:cTn id="37" dur="550" fill="hold"/>
+                                        <p:tgtEl>
+                                          <p:spTgt spid="8"/>
                                         </p:tgtEl>
                                         <p:attrNameLst>
                                           <p:attrName>ppt_y</p:attrName>
@@ -7559,8 +7622,8 @@
         </p:blipFill>
         <p:spPr>
           <a:xfrm>
-            <a:off x="5150991" y="1722076"/>
-            <a:ext cx="670543" cy="822939"/>
+            <a:off x="4846198" y="1722076"/>
+            <a:ext cx="899137" cy="822939"/>
           </a:xfrm>
           <a:prstGeom prst="rect">
             <a:avLst/>
@@ -7583,7 +7646,7 @@
         </p:blipFill>
         <p:spPr>
           <a:xfrm>
-            <a:off x="5074793" y="2865048"/>
+            <a:off x="4846198" y="2865048"/>
             <a:ext cx="899137" cy="746741"/>
           </a:xfrm>
           <a:prstGeom prst="rect">
@@ -7607,7 +7670,7 @@
         </p:blipFill>
         <p:spPr>
           <a:xfrm>
-            <a:off x="5074793" y="4008019"/>
+            <a:off x="4846198" y="4008019"/>
             <a:ext cx="899137" cy="746741"/>
           </a:xfrm>
           <a:prstGeom prst="rect">
@@ -8157,8 +8220,8 @@
         </p:blipFill>
         <p:spPr>
           <a:xfrm>
-            <a:off x="1188690" y="2103067"/>
-            <a:ext cx="1737316" cy="2118307"/>
+            <a:off x="1722076" y="2103067"/>
+            <a:ext cx="1661118" cy="2118307"/>
           </a:xfrm>
           <a:prstGeom prst="rect">
             <a:avLst/>
@@ -8181,8 +8244,8 @@
         </p:blipFill>
         <p:spPr>
           <a:xfrm>
-            <a:off x="5150991" y="960095"/>
-            <a:ext cx="1965910" cy="3261278"/>
+            <a:off x="6065368" y="960095"/>
+            <a:ext cx="1661118" cy="3261278"/>
           </a:xfrm>
           <a:prstGeom prst="rect">
             <a:avLst/>
@@ -8205,8 +8268,8 @@
         </p:blipFill>
         <p:spPr>
           <a:xfrm>
-            <a:off x="7589330" y="2103067"/>
-            <a:ext cx="1661118" cy="2118307"/>
+            <a:off x="10561055" y="2103067"/>
+            <a:ext cx="1630639" cy="2118307"/>
           </a:xfrm>
           <a:prstGeom prst="rect">
             <a:avLst/>
@@ -8731,66 +8794,90 @@
         </p:blipFill>
         <p:spPr>
           <a:xfrm>
-            <a:off x="10180065" y="4160415"/>
-            <a:ext cx="1584920" cy="2042108"/>
+            <a:off x="1264888" y="1645878"/>
+            <a:ext cx="1584920" cy="1584920"/>
           </a:xfrm>
           <a:prstGeom prst="rect">
             <a:avLst/>
           </a:prstGeom>
         </p:spPr>
       </p:pic>
-      <p:sp>
-        <p:nvSpPr>
-          <p:cNvPr id="4" name="Rectangle 3">
-            <a:hlinkClick r:id="rId4"/>
-          </p:cNvPr>
-          <p:cNvSpPr/>
+      <p:pic>
+        <p:nvPicPr>
+          <p:cNvPr id="4" name="Picture 3" descr="c7_2_0.jpg"/>
+          <p:cNvPicPr>
+            <a:picLocks noChangeAspect="1"/>
+          </p:cNvPicPr>
           <p:nvPr/>
-        </p:nvSpPr>
-        <p:spPr>
-          <a:xfrm>
-            <a:off x="655303" y="4724281"/>
-            <a:ext cx="2523109" cy="754361"/>
+        </p:nvPicPr>
+        <p:blipFill>
+          <a:blip r:embed="rId4"/>
+          <a:stretch>
+            <a:fillRect/>
+          </a:stretch>
+        </p:blipFill>
+        <p:spPr>
+          <a:xfrm>
+            <a:off x="5531981" y="1645878"/>
+            <a:ext cx="1584920" cy="1584920"/>
           </a:xfrm>
           <a:prstGeom prst="rect">
             <a:avLst/>
           </a:prstGeom>
-          <a:solidFill>
-            <a:srgbClr val="FFFFFF">
-              <a:alpha val="0"/>
-            </a:srgbClr>
-          </a:solidFill>
-          <a:ln>
-            <a:noFill/>
-          </a:ln>
-          <a:effectLst/>
-        </p:spPr>
-        <p:style>
-          <a:lnRef idx="1">
-            <a:schemeClr val="accent1"/>
-          </a:lnRef>
-          <a:fillRef idx="3">
-            <a:schemeClr val="accent1"/>
-          </a:fillRef>
-          <a:effectRef idx="2">
-            <a:schemeClr val="accent1"/>
-          </a:effectRef>
-          <a:fontRef idx="minor">
-            <a:schemeClr val="lt1"/>
-          </a:fontRef>
-        </p:style>
-        <p:txBody>
-          <a:bodyPr rtlCol="0" anchor="ctr"/>
-          <a:lstStyle/>
-          <a:p>
-            <a:pPr algn="ctr"/>
-          </a:p>
-        </p:txBody>
-      </p:sp>
+        </p:spPr>
+      </p:pic>
+      <p:pic>
+        <p:nvPicPr>
+          <p:cNvPr id="5" name="Picture 4" descr="c7_3_0.jpg"/>
+          <p:cNvPicPr>
+            <a:picLocks noChangeAspect="1"/>
+          </p:cNvPicPr>
+          <p:nvPr/>
+        </p:nvPicPr>
+        <p:blipFill>
+          <a:blip r:embed="rId5"/>
+          <a:stretch>
+            <a:fillRect/>
+          </a:stretch>
+        </p:blipFill>
+        <p:spPr>
+          <a:xfrm>
+            <a:off x="9799074" y="1645878"/>
+            <a:ext cx="1584920" cy="1584920"/>
+          </a:xfrm>
+          <a:prstGeom prst="rect">
+            <a:avLst/>
+          </a:prstGeom>
+        </p:spPr>
+      </p:pic>
+      <p:pic>
+        <p:nvPicPr>
+          <p:cNvPr id="6" name="Picture 5" descr="c7_4_0.jpg"/>
+          <p:cNvPicPr>
+            <a:picLocks noChangeAspect="1"/>
+          </p:cNvPicPr>
+          <p:nvPr/>
+        </p:nvPicPr>
+        <p:blipFill>
+          <a:blip r:embed="rId6"/>
+          <a:stretch>
+            <a:fillRect/>
+          </a:stretch>
+        </p:blipFill>
+        <p:spPr>
+          <a:xfrm>
+            <a:off x="0" y="5836773"/>
+            <a:ext cx="12191695" cy="1021054"/>
+          </a:xfrm>
+          <a:prstGeom prst="rect">
+            <a:avLst/>
+          </a:prstGeom>
+        </p:spPr>
+      </p:pic>
       <p:sp>
         <p:nvSpPr>
-          <p:cNvPr id="5" name="TextBox 4">
-            <a:hlinkClick action="ppaction://hlinksldjump" r:id="rId5"/>
+          <p:cNvPr id="7" name="TextBox 6">
+            <a:hlinkClick action="ppaction://hlinksldjump" r:id="rId7"/>
           </p:cNvPr>
           <p:cNvSpPr txBox="1"/>
           <p:nvPr/>
@@ -8855,7 +8942,7 @@
                             </p:stCondLst>
                             <p:childTnLst>
                               <p:par>
-                                <p:cTn id="5" presetID="10" presetClass="entr" presetSubtype="0" fill="hold" grpId="0" nodeType="clickEffect">
+                                <p:cTn id="5" presetID="53" presetClass="entr" presetSubtype="16" fill="hold" grpId="0" nodeType="clickEffect">
                                   <p:stCondLst>
                                     <p:cond delay="0"/>
                                   </p:stCondLst>
@@ -8878,14 +8965,349 @@
                                         <p:strVal val="visible"/>
                                       </p:to>
                                     </p:set>
+                                    <p:anim calcmode="lin" valueType="num">
+                                      <p:cBhvr additive="base">
+                                        <p:cTn id="7" dur="420" fill="hold"/>
+                                        <p:tgtEl>
+                                          <p:spTgt spid="3"/>
+                                        </p:tgtEl>
+                                        <p:attrNameLst>
+                                          <p:attrName>ppt_w</p:attrName>
+                                        </p:attrNameLst>
+                                      </p:cBhvr>
+                                      <p:tavLst>
+                                        <p:tav tm="0">
+                                          <p:val>
+                                            <p:strVal val="0"/>
+                                          </p:val>
+                                        </p:tav>
+                                        <p:tav tm="100000">
+                                          <p:val>
+                                            <p:strVal val="#ppt_w"/>
+                                          </p:val>
+                                        </p:tav>
+                                      </p:tavLst>
+                                    </p:anim>
+                                    <p:anim calcmode="lin" valueType="num">
+                                      <p:cBhvr additive="base">
+                                        <p:cTn id="8" dur="420" fill="hold"/>
+                                        <p:tgtEl>
+                                          <p:spTgt spid="3"/>
+                                        </p:tgtEl>
+                                        <p:attrNameLst>
+                                          <p:attrName>ppt_h</p:attrName>
+                                        </p:attrNameLst>
+                                      </p:cBhvr>
+                                      <p:tavLst>
+                                        <p:tav tm="0">
+                                          <p:val>
+                                            <p:strVal val="0"/>
+                                          </p:val>
+                                        </p:tav>
+                                        <p:tav tm="100000">
+                                          <p:val>
+                                            <p:strVal val="#ppt_h"/>
+                                          </p:val>
+                                        </p:tav>
+                                      </p:tavLst>
+                                    </p:anim>
                                     <p:animEffect transition="in" filter="fade">
                                       <p:cBhvr>
-                                        <p:cTn id="7" dur="450"/>
+                                        <p:cTn id="9" dur="420"/>
                                         <p:tgtEl>
                                           <p:spTgt spid="3"/>
                                         </p:tgtEl>
                                       </p:cBhvr>
                                     </p:animEffect>
+                                  </p:childTnLst>
+                                </p:cTn>
+                              </p:par>
+                            </p:childTnLst>
+                          </p:cTn>
+                        </p:par>
+                      </p:childTnLst>
+                    </p:cTn>
+                  </p:par>
+                  <p:par>
+                    <p:cTn id="10" fill="hold">
+                      <p:stCondLst>
+                        <p:cond delay="indefinite"/>
+                      </p:stCondLst>
+                      <p:childTnLst>
+                        <p:par>
+                          <p:cTn id="11" fill="hold">
+                            <p:stCondLst>
+                              <p:cond delay="0"/>
+                            </p:stCondLst>
+                            <p:childTnLst>
+                              <p:par>
+                                <p:cTn id="12" presetID="53" presetClass="entr" presetSubtype="16" fill="hold" grpId="0" nodeType="clickEffect">
+                                  <p:stCondLst>
+                                    <p:cond delay="0"/>
+                                  </p:stCondLst>
+                                  <p:childTnLst>
+                                    <p:set>
+                                      <p:cBhvr>
+                                        <p:cTn id="13" dur="1" fill="hold">
+                                          <p:stCondLst>
+                                            <p:cond delay="0"/>
+                                          </p:stCondLst>
+                                        </p:cTn>
+                                        <p:tgtEl>
+                                          <p:spTgt spid="4"/>
+                                        </p:tgtEl>
+                                        <p:attrNameLst>
+                                          <p:attrName>style.visibility</p:attrName>
+                                        </p:attrNameLst>
+                                      </p:cBhvr>
+                                      <p:to>
+                                        <p:strVal val="visible"/>
+                                      </p:to>
+                                    </p:set>
+                                    <p:anim calcmode="lin" valueType="num">
+                                      <p:cBhvr additive="base">
+                                        <p:cTn id="14" dur="420" fill="hold"/>
+                                        <p:tgtEl>
+                                          <p:spTgt spid="4"/>
+                                        </p:tgtEl>
+                                        <p:attrNameLst>
+                                          <p:attrName>ppt_w</p:attrName>
+                                        </p:attrNameLst>
+                                      </p:cBhvr>
+                                      <p:tavLst>
+                                        <p:tav tm="0">
+                                          <p:val>
+                                            <p:strVal val="0"/>
+                                          </p:val>
+                                        </p:tav>
+                                        <p:tav tm="100000">
+                                          <p:val>
+                                            <p:strVal val="#ppt_w"/>
+                                          </p:val>
+                                        </p:tav>
+                                      </p:tavLst>
+                                    </p:anim>
+                                    <p:anim calcmode="lin" valueType="num">
+                                      <p:cBhvr additive="base">
+                                        <p:cTn id="15" dur="420" fill="hold"/>
+                                        <p:tgtEl>
+                                          <p:spTgt spid="4"/>
+                                        </p:tgtEl>
+                                        <p:attrNameLst>
+                                          <p:attrName>ppt_h</p:attrName>
+                                        </p:attrNameLst>
+                                      </p:cBhvr>
+                                      <p:tavLst>
+                                        <p:tav tm="0">
+                                          <p:val>
+                                            <p:strVal val="0"/>
+                                          </p:val>
+                                        </p:tav>
+                                        <p:tav tm="100000">
+                                          <p:val>
+                                            <p:strVal val="#ppt_h"/>
+                                          </p:val>
+                                        </p:tav>
+                                      </p:tavLst>
+                                    </p:anim>
+                                    <p:animEffect transition="in" filter="fade">
+                                      <p:cBhvr>
+                                        <p:cTn id="16" dur="420"/>
+                                        <p:tgtEl>
+                                          <p:spTgt spid="4"/>
+                                        </p:tgtEl>
+                                      </p:cBhvr>
+                                    </p:animEffect>
+                                  </p:childTnLst>
+                                </p:cTn>
+                              </p:par>
+                            </p:childTnLst>
+                          </p:cTn>
+                        </p:par>
+                      </p:childTnLst>
+                    </p:cTn>
+                  </p:par>
+                  <p:par>
+                    <p:cTn id="17" fill="hold">
+                      <p:stCondLst>
+                        <p:cond delay="indefinite"/>
+                      </p:stCondLst>
+                      <p:childTnLst>
+                        <p:par>
+                          <p:cTn id="18" fill="hold">
+                            <p:stCondLst>
+                              <p:cond delay="0"/>
+                            </p:stCondLst>
+                            <p:childTnLst>
+                              <p:par>
+                                <p:cTn id="19" presetID="53" presetClass="entr" presetSubtype="16" fill="hold" grpId="0" nodeType="clickEffect">
+                                  <p:stCondLst>
+                                    <p:cond delay="0"/>
+                                  </p:stCondLst>
+                                  <p:childTnLst>
+                                    <p:set>
+                                      <p:cBhvr>
+                                        <p:cTn id="20" dur="1" fill="hold">
+                                          <p:stCondLst>
+                                            <p:cond delay="0"/>
+                                          </p:stCondLst>
+                                        </p:cTn>
+                                        <p:tgtEl>
+                                          <p:spTgt spid="5"/>
+                                        </p:tgtEl>
+                                        <p:attrNameLst>
+                                          <p:attrName>style.visibility</p:attrName>
+                                        </p:attrNameLst>
+                                      </p:cBhvr>
+                                      <p:to>
+                                        <p:strVal val="visible"/>
+                                      </p:to>
+                                    </p:set>
+                                    <p:anim calcmode="lin" valueType="num">
+                                      <p:cBhvr additive="base">
+                                        <p:cTn id="21" dur="420" fill="hold"/>
+                                        <p:tgtEl>
+                                          <p:spTgt spid="5"/>
+                                        </p:tgtEl>
+                                        <p:attrNameLst>
+                                          <p:attrName>ppt_w</p:attrName>
+                                        </p:attrNameLst>
+                                      </p:cBhvr>
+                                      <p:tavLst>
+                                        <p:tav tm="0">
+                                          <p:val>
+                                            <p:strVal val="0"/>
+                                          </p:val>
+                                        </p:tav>
+                                        <p:tav tm="100000">
+                                          <p:val>
+                                            <p:strVal val="#ppt_w"/>
+                                          </p:val>
+                                        </p:tav>
+                                      </p:tavLst>
+                                    </p:anim>
+                                    <p:anim calcmode="lin" valueType="num">
+                                      <p:cBhvr additive="base">
+                                        <p:cTn id="22" dur="420" fill="hold"/>
+                                        <p:tgtEl>
+                                          <p:spTgt spid="5"/>
+                                        </p:tgtEl>
+                                        <p:attrNameLst>
+                                          <p:attrName>ppt_h</p:attrName>
+                                        </p:attrNameLst>
+                                      </p:cBhvr>
+                                      <p:tavLst>
+                                        <p:tav tm="0">
+                                          <p:val>
+                                            <p:strVal val="0"/>
+                                          </p:val>
+                                        </p:tav>
+                                        <p:tav tm="100000">
+                                          <p:val>
+                                            <p:strVal val="#ppt_h"/>
+                                          </p:val>
+                                        </p:tav>
+                                      </p:tavLst>
+                                    </p:anim>
+                                    <p:animEffect transition="in" filter="fade">
+                                      <p:cBhvr>
+                                        <p:cTn id="23" dur="420"/>
+                                        <p:tgtEl>
+                                          <p:spTgt spid="5"/>
+                                        </p:tgtEl>
+                                      </p:cBhvr>
+                                    </p:animEffect>
+                                  </p:childTnLst>
+                                </p:cTn>
+                              </p:par>
+                            </p:childTnLst>
+                          </p:cTn>
+                        </p:par>
+                      </p:childTnLst>
+                    </p:cTn>
+                  </p:par>
+                  <p:par>
+                    <p:cTn id="24" fill="hold">
+                      <p:stCondLst>
+                        <p:cond delay="indefinite"/>
+                      </p:stCondLst>
+                      <p:childTnLst>
+                        <p:par>
+                          <p:cTn id="25" fill="hold">
+                            <p:stCondLst>
+                              <p:cond delay="0"/>
+                            </p:stCondLst>
+                            <p:childTnLst>
+                              <p:par>
+                                <p:cTn id="26" presetID="2" presetClass="entr" presetSubtype="4" fill="hold" decel="100000" grpId="0" nodeType="clickEffect">
+                                  <p:stCondLst>
+                                    <p:cond delay="0"/>
+                                  </p:stCondLst>
+                                  <p:childTnLst>
+                                    <p:set>
+                                      <p:cBhvr>
+                                        <p:cTn id="27" dur="1" fill="hold">
+                                          <p:stCondLst>
+                                            <p:cond delay="0"/>
+                                          </p:stCondLst>
+                                        </p:cTn>
+                                        <p:tgtEl>
+                                          <p:spTgt spid="6"/>
+                                        </p:tgtEl>
+                                        <p:attrNameLst>
+                                          <p:attrName>style.visibility</p:attrName>
+                                        </p:attrNameLst>
+                                      </p:cBhvr>
+                                      <p:to>
+                                        <p:strVal val="visible"/>
+                                      </p:to>
+                                    </p:set>
+                                    <p:anim calcmode="lin" valueType="num">
+                                      <p:cBhvr additive="base">
+                                        <p:cTn id="28" dur="550" fill="hold"/>
+                                        <p:tgtEl>
+                                          <p:spTgt spid="6"/>
+                                        </p:tgtEl>
+                                        <p:attrNameLst>
+                                          <p:attrName>ppt_x</p:attrName>
+                                        </p:attrNameLst>
+                                      </p:cBhvr>
+                                      <p:tavLst>
+                                        <p:tav tm="0">
+                                          <p:val>
+                                            <p:strVal val="#ppt_x"/>
+                                          </p:val>
+                                        </p:tav>
+                                        <p:tav tm="100000">
+                                          <p:val>
+                                            <p:strVal val="#ppt_x"/>
+                                          </p:val>
+                                        </p:tav>
+                                      </p:tavLst>
+                                    </p:anim>
+                                    <p:anim calcmode="lin" valueType="num">
+                                      <p:cBhvr additive="base">
+                                        <p:cTn id="29" dur="550" fill="hold"/>
+                                        <p:tgtEl>
+                                          <p:spTgt spid="6"/>
+                                        </p:tgtEl>
+                                        <p:attrNameLst>
+                                          <p:attrName>ppt_y</p:attrName>
+                                        </p:attrNameLst>
+                                      </p:cBhvr>
+                                      <p:tavLst>
+                                        <p:tav tm="0">
+                                          <p:val>
+                                            <p:strVal val="1+#ppt_h/2"/>
+                                          </p:val>
+                                        </p:tav>
+                                        <p:tav tm="100000">
+                                          <p:val>
+                                            <p:strVal val="#ppt_y"/>
+                                          </p:val>
+                                        </p:tav>
+                                      </p:tavLst>
+                                    </p:anim>
                                   </p:childTnLst>
                                 </p:cTn>
                               </p:par>
@@ -8970,66 +9392,66 @@
         </p:blipFill>
         <p:spPr>
           <a:xfrm>
-            <a:off x="426709" y="2103067"/>
-            <a:ext cx="5699617" cy="2804089"/>
+            <a:off x="10180065" y="4160415"/>
+            <a:ext cx="1584920" cy="2042108"/>
           </a:xfrm>
           <a:prstGeom prst="rect">
             <a:avLst/>
           </a:prstGeom>
         </p:spPr>
       </p:pic>
-      <p:pic>
-        <p:nvPicPr>
-          <p:cNvPr id="4" name="Picture 3" descr="c8_2_0.jpg"/>
-          <p:cNvPicPr>
-            <a:picLocks noChangeAspect="1"/>
-          </p:cNvPicPr>
+      <p:sp>
+        <p:nvSpPr>
+          <p:cNvPr id="4" name="Rectangle 3">
+            <a:hlinkClick r:id="rId4"/>
+          </p:cNvPr>
+          <p:cNvSpPr/>
           <p:nvPr/>
-        </p:nvPicPr>
-        <p:blipFill>
-          <a:blip r:embed="rId4"/>
-          <a:stretch>
-            <a:fillRect/>
-          </a:stretch>
-        </p:blipFill>
-        <p:spPr>
-          <a:xfrm>
-            <a:off x="350511" y="1722076"/>
-            <a:ext cx="11566870" cy="4099457"/>
+        </p:nvSpPr>
+        <p:spPr>
+          <a:xfrm>
+            <a:off x="655303" y="4724281"/>
+            <a:ext cx="2218317" cy="754361"/>
           </a:xfrm>
           <a:prstGeom prst="rect">
             <a:avLst/>
           </a:prstGeom>
-        </p:spPr>
-      </p:pic>
-      <p:pic>
-        <p:nvPicPr>
-          <p:cNvPr id="5" name="Picture 4" descr="c8_3_0.jpg"/>
-          <p:cNvPicPr>
-            <a:picLocks noChangeAspect="1"/>
-          </p:cNvPicPr>
-          <p:nvPr/>
-        </p:nvPicPr>
-        <p:blipFill>
-          <a:blip r:embed="rId5"/>
-          <a:stretch>
-            <a:fillRect/>
-          </a:stretch>
-        </p:blipFill>
-        <p:spPr>
-          <a:xfrm>
-            <a:off x="0" y="5836773"/>
-            <a:ext cx="12191695" cy="1021054"/>
-          </a:xfrm>
-          <a:prstGeom prst="rect">
-            <a:avLst/>
-          </a:prstGeom>
-        </p:spPr>
-      </p:pic>
+          <a:solidFill>
+            <a:srgbClr val="FFFFFF">
+              <a:alpha val="0"/>
+            </a:srgbClr>
+          </a:solidFill>
+          <a:ln>
+            <a:noFill/>
+          </a:ln>
+          <a:effectLst/>
+        </p:spPr>
+        <p:style>
+          <a:lnRef idx="1">
+            <a:schemeClr val="accent1"/>
+          </a:lnRef>
+          <a:fillRef idx="3">
+            <a:schemeClr val="accent1"/>
+          </a:fillRef>
+          <a:effectRef idx="2">
+            <a:schemeClr val="accent1"/>
+          </a:effectRef>
+          <a:fontRef idx="minor">
+            <a:schemeClr val="lt1"/>
+          </a:fontRef>
+        </p:style>
+        <p:txBody>
+          <a:bodyPr rtlCol="0" anchor="ctr"/>
+          <a:lstStyle/>
+          <a:p>
+            <a:pPr algn="ctr"/>
+          </a:p>
+        </p:txBody>
+      </p:sp>
       <p:sp>
         <p:nvSpPr>
-          <p:cNvPr id="6" name="TextBox 5">
-            <a:hlinkClick action="ppaction://hlinksldjump" r:id="rId6"/>
+          <p:cNvPr id="5" name="TextBox 4">
+            <a:hlinkClick action="ppaction://hlinksldjump" r:id="rId5"/>
           </p:cNvPr>
           <p:cNvSpPr txBox="1"/>
           <p:nvPr/>
@@ -9094,7 +9516,7 @@
                             </p:stCondLst>
                             <p:childTnLst>
                               <p:par>
-                                <p:cTn id="5" presetID="2" presetClass="entr" presetSubtype="4" fill="hold" decel="100000" grpId="0" nodeType="clickEffect">
+                                <p:cTn id="5" presetID="10" presetClass="entr" presetSubtype="0" fill="hold" grpId="0" nodeType="clickEffect">
                                   <p:stCondLst>
                                     <p:cond delay="0"/>
                                   </p:stCondLst>
@@ -9117,196 +9539,14 @@
                                         <p:strVal val="visible"/>
                                       </p:to>
                                     </p:set>
-                                    <p:anim calcmode="lin" valueType="num">
-                                      <p:cBhvr additive="base">
-                                        <p:cTn id="7" dur="550" fill="hold"/>
-                                        <p:tgtEl>
-                                          <p:spTgt spid="3"/>
-                                        </p:tgtEl>
-                                        <p:attrNameLst>
-                                          <p:attrName>ppt_x</p:attrName>
-                                        </p:attrNameLst>
-                                      </p:cBhvr>
-                                      <p:tavLst>
-                                        <p:tav tm="0">
-                                          <p:val>
-                                            <p:strVal val="#ppt_x"/>
-                                          </p:val>
-                                        </p:tav>
-                                        <p:tav tm="100000">
-                                          <p:val>
-                                            <p:strVal val="#ppt_x"/>
-                                          </p:val>
-                                        </p:tav>
-                                      </p:tavLst>
-                                    </p:anim>
-                                    <p:anim calcmode="lin" valueType="num">
-                                      <p:cBhvr additive="base">
-                                        <p:cTn id="8" dur="550" fill="hold"/>
-                                        <p:tgtEl>
-                                          <p:spTgt spid="3"/>
-                                        </p:tgtEl>
-                                        <p:attrNameLst>
-                                          <p:attrName>ppt_y</p:attrName>
-                                        </p:attrNameLst>
-                                      </p:cBhvr>
-                                      <p:tavLst>
-                                        <p:tav tm="0">
-                                          <p:val>
-                                            <p:strVal val="1+#ppt_h/2"/>
-                                          </p:val>
-                                        </p:tav>
-                                        <p:tav tm="100000">
-                                          <p:val>
-                                            <p:strVal val="#ppt_y"/>
-                                          </p:val>
-                                        </p:tav>
-                                      </p:tavLst>
-                                    </p:anim>
-                                  </p:childTnLst>
-                                </p:cTn>
-                              </p:par>
-                            </p:childTnLst>
-                          </p:cTn>
-                        </p:par>
-                      </p:childTnLst>
-                    </p:cTn>
-                  </p:par>
-                  <p:par>
-                    <p:cTn id="9" fill="hold">
-                      <p:stCondLst>
-                        <p:cond delay="indefinite"/>
-                      </p:stCondLst>
-                      <p:childTnLst>
-                        <p:par>
-                          <p:cTn id="10" fill="hold">
-                            <p:stCondLst>
-                              <p:cond delay="0"/>
-                            </p:stCondLst>
-                            <p:childTnLst>
-                              <p:par>
-                                <p:cTn id="11" presetID="10" presetClass="entr" presetSubtype="0" fill="hold" grpId="0" nodeType="clickEffect">
-                                  <p:stCondLst>
-                                    <p:cond delay="0"/>
-                                  </p:stCondLst>
-                                  <p:childTnLst>
-                                    <p:set>
-                                      <p:cBhvr>
-                                        <p:cTn id="12" dur="1" fill="hold">
-                                          <p:stCondLst>
-                                            <p:cond delay="0"/>
-                                          </p:stCondLst>
-                                        </p:cTn>
-                                        <p:tgtEl>
-                                          <p:spTgt spid="4"/>
-                                        </p:tgtEl>
-                                        <p:attrNameLst>
-                                          <p:attrName>style.visibility</p:attrName>
-                                        </p:attrNameLst>
-                                      </p:cBhvr>
-                                      <p:to>
-                                        <p:strVal val="visible"/>
-                                      </p:to>
-                                    </p:set>
                                     <p:animEffect transition="in" filter="fade">
                                       <p:cBhvr>
-                                        <p:cTn id="13" dur="500"/>
-                                        <p:tgtEl>
-                                          <p:spTgt spid="4"/>
+                                        <p:cTn id="7" dur="450"/>
+                                        <p:tgtEl>
+                                          <p:spTgt spid="3"/>
                                         </p:tgtEl>
                                       </p:cBhvr>
                                     </p:animEffect>
-                                  </p:childTnLst>
-                                </p:cTn>
-                              </p:par>
-                            </p:childTnLst>
-                          </p:cTn>
-                        </p:par>
-                      </p:childTnLst>
-                    </p:cTn>
-                  </p:par>
-                  <p:par>
-                    <p:cTn id="14" fill="hold">
-                      <p:stCondLst>
-                        <p:cond delay="indefinite"/>
-                      </p:stCondLst>
-                      <p:childTnLst>
-                        <p:par>
-                          <p:cTn id="15" fill="hold">
-                            <p:stCondLst>
-                              <p:cond delay="0"/>
-                            </p:stCondLst>
-                            <p:childTnLst>
-                              <p:par>
-                                <p:cTn id="16" presetID="2" presetClass="entr" presetSubtype="4" fill="hold" decel="100000" grpId="0" nodeType="clickEffect">
-                                  <p:stCondLst>
-                                    <p:cond delay="0"/>
-                                  </p:stCondLst>
-                                  <p:childTnLst>
-                                    <p:set>
-                                      <p:cBhvr>
-                                        <p:cTn id="17" dur="1" fill="hold">
-                                          <p:stCondLst>
-                                            <p:cond delay="0"/>
-                                          </p:stCondLst>
-                                        </p:cTn>
-                                        <p:tgtEl>
-                                          <p:spTgt spid="5"/>
-                                        </p:tgtEl>
-                                        <p:attrNameLst>
-                                          <p:attrName>style.visibility</p:attrName>
-                                        </p:attrNameLst>
-                                      </p:cBhvr>
-                                      <p:to>
-                                        <p:strVal val="visible"/>
-                                      </p:to>
-                                    </p:set>
-                                    <p:anim calcmode="lin" valueType="num">
-                                      <p:cBhvr additive="base">
-                                        <p:cTn id="18" dur="550" fill="hold"/>
-                                        <p:tgtEl>
-                                          <p:spTgt spid="5"/>
-                                        </p:tgtEl>
-                                        <p:attrNameLst>
-                                          <p:attrName>ppt_x</p:attrName>
-                                        </p:attrNameLst>
-                                      </p:cBhvr>
-                                      <p:tavLst>
-                                        <p:tav tm="0">
-                                          <p:val>
-                                            <p:strVal val="#ppt_x"/>
-                                          </p:val>
-                                        </p:tav>
-                                        <p:tav tm="100000">
-                                          <p:val>
-                                            <p:strVal val="#ppt_x"/>
-                                          </p:val>
-                                        </p:tav>
-                                      </p:tavLst>
-                                    </p:anim>
-                                    <p:anim calcmode="lin" valueType="num">
-                                      <p:cBhvr additive="base">
-                                        <p:cTn id="19" dur="550" fill="hold"/>
-                                        <p:tgtEl>
-                                          <p:spTgt spid="5"/>
-                                        </p:tgtEl>
-                                        <p:attrNameLst>
-                                          <p:attrName>ppt_y</p:attrName>
-                                        </p:attrNameLst>
-                                      </p:cBhvr>
-                                      <p:tavLst>
-                                        <p:tav tm="0">
-                                          <p:val>
-                                            <p:strVal val="1+#ppt_h/2"/>
-                                          </p:val>
-                                        </p:tav>
-                                        <p:tav tm="100000">
-                                          <p:val>
-                                            <p:strVal val="#ppt_y"/>
-                                          </p:val>
-                                        </p:tav>
-                                      </p:tavLst>
-                                    </p:anim>
                                   </p:childTnLst>
                                 </p:cTn>
                               </p:par>

--- a/temp/files/T4-temp.pptx
+++ b/temp/files/T4-temp.pptx
@@ -8268,8 +8268,8 @@
         </p:blipFill>
         <p:spPr>
           <a:xfrm>
-            <a:off x="10561055" y="2103067"/>
-            <a:ext cx="1630639" cy="2118307"/>
+            <a:off x="10637253" y="2103067"/>
+            <a:ext cx="1554441" cy="2118307"/>
           </a:xfrm>
           <a:prstGeom prst="rect">
             <a:avLst/>
@@ -8842,7 +8842,7 @@
         </p:blipFill>
         <p:spPr>
           <a:xfrm>
-            <a:off x="9799074" y="1645878"/>
+            <a:off x="9951471" y="1645878"/>
             <a:ext cx="1584920" cy="1584920"/>
           </a:xfrm>
           <a:prstGeom prst="rect">

--- a/temp/files/T4-temp.pptx
+++ b/temp/files/T4-temp.pptx
@@ -3141,7 +3141,7 @@
         <p:spPr>
           <a:xfrm>
             <a:off x="9722876" y="3931821"/>
-            <a:ext cx="1889712" cy="2270703"/>
+            <a:ext cx="1889712" cy="2423099"/>
           </a:xfrm>
           <a:prstGeom prst="rect">
             <a:avLst/>
